--- a/entregables/Presentacion_EV1_StreamView_Analytics.pptx
+++ b/entregables/Presentacion_EV1_StreamView_Analytics.pptx
@@ -9,18 +9,18 @@
   </p:notesMasterIdLst>
   <p:sldIdLst>
     <p:sldId id="256" r:id="rId2"/>
-    <p:sldId id="257" r:id="rId3"/>
-    <p:sldId id="258" r:id="rId4"/>
-    <p:sldId id="259" r:id="rId5"/>
-    <p:sldId id="260" r:id="rId6"/>
+    <p:sldId id="258" r:id="rId3"/>
+    <p:sldId id="259" r:id="rId4"/>
+    <p:sldId id="260" r:id="rId5"/>
+    <p:sldId id="271" r:id="rId6"/>
     <p:sldId id="261" r:id="rId7"/>
-    <p:sldId id="262" r:id="rId8"/>
-    <p:sldId id="263" r:id="rId9"/>
-    <p:sldId id="264" r:id="rId10"/>
-    <p:sldId id="265" r:id="rId11"/>
-    <p:sldId id="266" r:id="rId12"/>
+    <p:sldId id="263" r:id="rId8"/>
+    <p:sldId id="264" r:id="rId9"/>
+    <p:sldId id="265" r:id="rId10"/>
+    <p:sldId id="266" r:id="rId11"/>
+    <p:sldId id="272" r:id="rId12"/>
     <p:sldId id="267" r:id="rId13"/>
-    <p:sldId id="268" r:id="rId14"/>
+    <p:sldId id="273" r:id="rId14"/>
     <p:sldId id="269" r:id="rId15"/>
     <p:sldId id="270" r:id="rId16"/>
   </p:sldIdLst>
@@ -165,7 +165,7 @@
     </p:spTree>
     <p:extLst>
       <p:ext uri="{BB962C8B-B14F-4D97-AF65-F5344CB8AC3E}">
-        <p14:creationId xmlns:p14="http://schemas.microsoft.com/office/powerpoint/2010/main" val="2149290666"/>
+        <p14:creationId xmlns:p14="http://schemas.microsoft.com/office/powerpoint/2010/main" val="2736845314"/>
       </p:ext>
     </p:extLst>
   </p:cSld>
@@ -380,7 +380,7 @@
           <a:lstStyle/>
           <a:p>
             <a:r>
-              <a:t>El dato mas contundente de toda la charla, no saltarselo aunque el tiempo apriete. Talk (4,17) y Soap (5,19) lideran popularidad y son los peor evaluados. Animation (6,71) e History (6,67) lideran calificacion.</a:t>
+              <a:t>Mostrar los dos rankings uno al lado del otro y dejar que el contraste hable. Cero titulos en comun entre ambas listas.</a:t>
             </a:r>
           </a:p>
         </p:txBody>
@@ -410,7 +410,13 @@
   <p:cSld>
     <p:spTree>
       <p:nvGrpSpPr>
-        <p:cNvPr id="1" name=""/>
+        <p:cNvPr id="1" name="">
+          <a:extLst>
+            <a:ext uri="{FF2B5EF4-FFF2-40B4-BE49-F238E27FC236}">
+              <a16:creationId xmlns:a16="http://schemas.microsoft.com/office/drawing/2014/main" id="{E3E88250-E174-9A8E-3280-4A74C1BC80E1}"/>
+            </a:ext>
+          </a:extLst>
+        </p:cNvPr>
         <p:cNvGrpSpPr/>
         <p:nvPr/>
       </p:nvGrpSpPr>
@@ -424,7 +430,13 @@
       </p:grpSpPr>
       <p:sp>
         <p:nvSpPr>
-          <p:cNvPr id="2" name="Slide Image Placeholder 1"/>
+          <p:cNvPr id="2" name="Slide Image Placeholder 1">
+            <a:extLst>
+              <a:ext uri="{FF2B5EF4-FFF2-40B4-BE49-F238E27FC236}">
+                <a16:creationId xmlns:a16="http://schemas.microsoft.com/office/drawing/2014/main" id="{2EE9A9E7-C449-BE7F-525D-D836888D486A}"/>
+              </a:ext>
+            </a:extLst>
+          </p:cNvPr>
           <p:cNvSpPr>
             <a:spLocks noGrp="1" noRot="1" noChangeAspect="1"/>
           </p:cNvSpPr>
@@ -436,7 +448,13 @@
       </p:sp>
       <p:sp>
         <p:nvSpPr>
-          <p:cNvPr id="3" name="Notes Placeholder 2"/>
+          <p:cNvPr id="3" name="Notes Placeholder 2">
+            <a:extLst>
+              <a:ext uri="{FF2B5EF4-FFF2-40B4-BE49-F238E27FC236}">
+                <a16:creationId xmlns:a16="http://schemas.microsoft.com/office/drawing/2014/main" id="{34225281-85B1-AEEC-68AB-2F50EA67F5A8}"/>
+              </a:ext>
+            </a:extLst>
+          </p:cNvPr>
           <p:cNvSpPr>
             <a:spLocks noGrp="1"/>
           </p:cNvSpPr>
@@ -457,7 +475,13 @@
       </p:sp>
       <p:sp>
         <p:nvSpPr>
-          <p:cNvPr id="4" name="Slide Number Placeholder 3"/>
+          <p:cNvPr id="4" name="Slide Number Placeholder 3">
+            <a:extLst>
+              <a:ext uri="{FF2B5EF4-FFF2-40B4-BE49-F238E27FC236}">
+                <a16:creationId xmlns:a16="http://schemas.microsoft.com/office/drawing/2014/main" id="{AC8C08D8-A939-FC30-25BE-BE48046A1CC2}"/>
+              </a:ext>
+            </a:extLst>
+          </p:cNvPr>
           <p:cNvSpPr>
             <a:spLocks noGrp="1"/>
           </p:cNvSpPr>
@@ -468,6 +492,11 @@
         <p:spPr/>
       </p:sp>
     </p:spTree>
+    <p:extLst>
+      <p:ext uri="{BB962C8B-B14F-4D97-AF65-F5344CB8AC3E}">
+        <p14:creationId xmlns:p14="http://schemas.microsoft.com/office/powerpoint/2010/main" val="3271491905"/>
+      </p:ext>
+    </p:extLst>
   </p:cSld>
   <p:clrMapOvr>
     <a:masterClrMapping/>
@@ -550,7 +579,13 @@
   <p:cSld>
     <p:spTree>
       <p:nvGrpSpPr>
-        <p:cNvPr id="1" name=""/>
+        <p:cNvPr id="1" name="">
+          <a:extLst>
+            <a:ext uri="{FF2B5EF4-FFF2-40B4-BE49-F238E27FC236}">
+              <a16:creationId xmlns:a16="http://schemas.microsoft.com/office/drawing/2014/main" id="{CDA223B9-AA6F-997A-3B7D-2B6D528F54D9}"/>
+            </a:ext>
+          </a:extLst>
+        </p:cNvPr>
         <p:cNvGrpSpPr/>
         <p:nvPr/>
       </p:nvGrpSpPr>
@@ -564,7 +599,13 @@
       </p:grpSpPr>
       <p:sp>
         <p:nvSpPr>
-          <p:cNvPr id="2" name="Slide Image Placeholder 1"/>
+          <p:cNvPr id="2" name="Slide Image Placeholder 1">
+            <a:extLst>
+              <a:ext uri="{FF2B5EF4-FFF2-40B4-BE49-F238E27FC236}">
+                <a16:creationId xmlns:a16="http://schemas.microsoft.com/office/drawing/2014/main" id="{782BB320-545B-2D64-AEA7-D36979299BB4}"/>
+              </a:ext>
+            </a:extLst>
+          </p:cNvPr>
           <p:cNvSpPr>
             <a:spLocks noGrp="1" noRot="1" noChangeAspect="1"/>
           </p:cNvSpPr>
@@ -576,7 +617,13 @@
       </p:sp>
       <p:sp>
         <p:nvSpPr>
-          <p:cNvPr id="3" name="Notes Placeholder 2"/>
+          <p:cNvPr id="3" name="Notes Placeholder 2">
+            <a:extLst>
+              <a:ext uri="{FF2B5EF4-FFF2-40B4-BE49-F238E27FC236}">
+                <a16:creationId xmlns:a16="http://schemas.microsoft.com/office/drawing/2014/main" id="{B86F2F7F-FF96-5BBD-02DC-8B50B8C516A9}"/>
+              </a:ext>
+            </a:extLst>
+          </p:cNvPr>
           <p:cNvSpPr>
             <a:spLocks noGrp="1"/>
           </p:cNvSpPr>
@@ -590,14 +637,20 @@
           <a:lstStyle/>
           <a:p>
             <a:r>
-              <a:t>Justificacion tecnica de las representaciones visuales. No leer los cinco puntos completos, elegir dos o tres segun el tiempo restante, priorizar el de mediana vs promedio y el de color por rol, son los mas especificos de este proyecto.</a:t>
-            </a:r>
-          </a:p>
-        </p:txBody>
-      </p:sp>
-      <p:sp>
-        <p:nvSpPr>
-          <p:cNvPr id="4" name="Slide Number Placeholder 3"/>
+              <a:t>Filipinas casi triplica la popularidad tipica de Estados Unidos (51,1 vs 18,0). Japon lidera en calificacion (6,6), no en popularidad.</a:t>
+            </a:r>
+          </a:p>
+        </p:txBody>
+      </p:sp>
+      <p:sp>
+        <p:nvSpPr>
+          <p:cNvPr id="4" name="Slide Number Placeholder 3">
+            <a:extLst>
+              <a:ext uri="{FF2B5EF4-FFF2-40B4-BE49-F238E27FC236}">
+                <a16:creationId xmlns:a16="http://schemas.microsoft.com/office/drawing/2014/main" id="{478692ED-6576-8725-3EB0-38433D0B491B}"/>
+              </a:ext>
+            </a:extLst>
+          </p:cNvPr>
           <p:cNvSpPr>
             <a:spLocks noGrp="1"/>
           </p:cNvSpPr>
@@ -608,6 +661,11 @@
         <p:spPr/>
       </p:sp>
     </p:spTree>
+    <p:extLst>
+      <p:ext uri="{BB962C8B-B14F-4D97-AF65-F5344CB8AC3E}">
+        <p14:creationId xmlns:p14="http://schemas.microsoft.com/office/powerpoint/2010/main" val="2672081540"/>
+      </p:ext>
+    </p:extLst>
   </p:cSld>
   <p:clrMapOvr>
     <a:masterClrMapping/>
@@ -660,7 +718,7 @@
           <a:lstStyle/>
           <a:p>
             <a:r>
-              <a:t>Ritmo mas rapido aqui, son las conclusiones accionables. No leer literal, decirlas con las propias palabras.</a:t>
+              <a:t>Ritmo mas rapido aqui, son las conclusiones accionables. No leer literal, decirlas con las propias palabras. Aplican a cualquier area que decida sobre el catalogo, no solo a la alta direccion.</a:t>
             </a:r>
           </a:p>
         </p:txBody>
@@ -800,7 +858,7 @@
           <a:lstStyle/>
           <a:p>
             <a:r>
-              <a:t>Diapositiva de estrategia de comunicacion. Nombrar a los seis stakeholders del caso, marcar los dos destacados como el publico real de esta charla, y explicar por que eso definio la estructura, poco tiempo en caracterizacion, mucho en un solo hallazgo accionable.</a:t>
+              <a:t>Situar el tamano del catalogo en pocos segundos, no detenerse en detalle tecnico aqui. Mencionar de pasada que son dos datasets oficiales de Netflix.</a:t>
             </a:r>
           </a:p>
         </p:txBody>
@@ -870,7 +928,7 @@
           <a:lstStyle/>
           <a:p>
             <a:r>
-              <a:t>Esta diapositiva responde de frente la pregunta que mas se repite al ver la charla, por que se enfoca en un solo hallazgo. Decirlo con seguridad, es una decision de estrategia de comunicacion, no una limitacion, el resto de los objetivos del caso viven en el notebook y el dashboard.</a:t>
+              <a:t>Diapositiva rapida, nombrar el patron y seguir, no detenerse en cada barra.</a:t>
             </a:r>
           </a:p>
         </p:txBody>
@@ -940,7 +998,7 @@
           <a:lstStyle/>
           <a:p>
             <a:r>
-              <a:t>Situar el tamano del catalogo en pocos segundos, no detenerse en detalle tecnico aqui. Mencionar de pasada que son dos datasets oficiales de Netflix.</a:t>
+              <a:t>Tambien rapida. Estados Unidos produce mas que los siguientes 4 paises del top 10 combinados. El ingles casi quintuplica al segundo idioma, el chino mandarin.</a:t>
             </a:r>
           </a:p>
         </p:txBody>
@@ -970,7 +1028,13 @@
   <p:cSld>
     <p:spTree>
       <p:nvGrpSpPr>
-        <p:cNvPr id="1" name=""/>
+        <p:cNvPr id="1" name="">
+          <a:extLst>
+            <a:ext uri="{FF2B5EF4-FFF2-40B4-BE49-F238E27FC236}">
+              <a16:creationId xmlns:a16="http://schemas.microsoft.com/office/drawing/2014/main" id="{B0BDB02C-34D7-D9D3-9F36-56C55127C7A5}"/>
+            </a:ext>
+          </a:extLst>
+        </p:cNvPr>
         <p:cNvGrpSpPr/>
         <p:nvPr/>
       </p:nvGrpSpPr>
@@ -984,7 +1048,13 @@
       </p:grpSpPr>
       <p:sp>
         <p:nvSpPr>
-          <p:cNvPr id="2" name="Slide Image Placeholder 1"/>
+          <p:cNvPr id="2" name="Slide Image Placeholder 1">
+            <a:extLst>
+              <a:ext uri="{FF2B5EF4-FFF2-40B4-BE49-F238E27FC236}">
+                <a16:creationId xmlns:a16="http://schemas.microsoft.com/office/drawing/2014/main" id="{FB7A0325-2793-2B31-15D0-0EEE6E22E35A}"/>
+              </a:ext>
+            </a:extLst>
+          </p:cNvPr>
           <p:cNvSpPr>
             <a:spLocks noGrp="1" noRot="1" noChangeAspect="1"/>
           </p:cNvSpPr>
@@ -996,7 +1066,13 @@
       </p:sp>
       <p:sp>
         <p:nvSpPr>
-          <p:cNvPr id="3" name="Notes Placeholder 2"/>
+          <p:cNvPr id="3" name="Notes Placeholder 2">
+            <a:extLst>
+              <a:ext uri="{FF2B5EF4-FFF2-40B4-BE49-F238E27FC236}">
+                <a16:creationId xmlns:a16="http://schemas.microsoft.com/office/drawing/2014/main" id="{E380951F-3C61-A4E5-1D19-72EC6D22F939}"/>
+              </a:ext>
+            </a:extLst>
+          </p:cNvPr>
           <p:cNvSpPr>
             <a:spLocks noGrp="1"/>
           </p:cNvSpPr>
@@ -1010,14 +1086,20 @@
           <a:lstStyle/>
           <a:p>
             <a:r>
-              <a:t>Diapositiva rapida, nombrar el patron y seguir, no detenerse en cada barra.</a:t>
-            </a:r>
-          </a:p>
-        </p:txBody>
-      </p:sp>
-      <p:sp>
-        <p:nvSpPr>
-          <p:cNvPr id="4" name="Slide Number Placeholder 3"/>
+              <a:t>Tambien rapida. Estados Unidos produce mas que los siguientes 4 paises del top 10 combinados. El ingles casi quintuplica al segundo idioma, el chino mandarin.</a:t>
+            </a:r>
+          </a:p>
+        </p:txBody>
+      </p:sp>
+      <p:sp>
+        <p:nvSpPr>
+          <p:cNvPr id="4" name="Slide Number Placeholder 3">
+            <a:extLst>
+              <a:ext uri="{FF2B5EF4-FFF2-40B4-BE49-F238E27FC236}">
+                <a16:creationId xmlns:a16="http://schemas.microsoft.com/office/drawing/2014/main" id="{D1D5D3A0-825D-3A34-A342-E5E4494091A1}"/>
+              </a:ext>
+            </a:extLst>
+          </p:cNvPr>
           <p:cNvSpPr>
             <a:spLocks noGrp="1"/>
           </p:cNvSpPr>
@@ -1028,6 +1110,11 @@
         <p:spPr/>
       </p:sp>
     </p:spTree>
+    <p:extLst>
+      <p:ext uri="{BB962C8B-B14F-4D97-AF65-F5344CB8AC3E}">
+        <p14:creationId xmlns:p14="http://schemas.microsoft.com/office/powerpoint/2010/main" val="1444047356"/>
+      </p:ext>
+    </p:extLst>
   </p:cSld>
   <p:clrMapOvr>
     <a:masterClrMapping/>
@@ -1080,7 +1167,7 @@
           <a:lstStyle/>
           <a:p>
             <a:r>
-              <a:t>Tambien rapida. Estados Unidos produce mas que los siguientes 4 paises del top 10 combinados. El ingles casi quintuplica al segundo idioma, el chino mandarin.</a:t>
+              <a:t>Momento de mostrar pensamiento critico. La primera lectura fue que el catalogo crecio, graficarlo revelo que era una muestra curada, no una tendencia real.</a:t>
             </a:r>
           </a:p>
         </p:txBody>
@@ -1150,7 +1237,7 @@
           <a:lstStyle/>
           <a:p>
             <a:r>
-              <a:t>Momento de mostrar pensamiento critico. La primera lectura fue que el catalogo crecio, graficarlo revelo que era una muestra curada, no una tendencia real.</a:t>
+              <a:t>Bisagra de la presentacion, anunciarla como tal. Correlacion practicamente nula, r=0,088 en peliculas, r=-0,022 en series, justo lo contrario de lo que se acaba de anticipar.</a:t>
             </a:r>
           </a:p>
         </p:txBody>
@@ -1220,7 +1307,7 @@
           <a:lstStyle/>
           <a:p>
             <a:r>
-              <a:t>Bisagra de la presentacion, anunciarla como tal. Correlacion practicamente nula, r=0,088 en peliculas, r=-0,022 en series.</a:t>
+              <a:t>El top 10 de popularidad lo dominan programas de conversacion y telenovelas. Solo 3 peliculas entran a esa lista.</a:t>
             </a:r>
           </a:p>
         </p:txBody>
@@ -1290,7 +1377,7 @@
           <a:lstStyle/>
           <a:p>
             <a:r>
-              <a:t>El top 10 de popularidad lo dominan programas de conversacion y telenovelas. Solo 3 peliculas entran a esa lista.</a:t>
+              <a:t>El dato mas contundente de toda la charla, no saltarselo aunque el tiempo apriete. Talk (4,17) y Soap (5,19) lideran popularidad y son los peor evaluados.</a:t>
             </a:r>
           </a:p>
         </p:txBody>
@@ -4327,258 +4414,9 @@
           </a:p>
         </p:txBody>
       </p:sp>
-      <p:sp>
-        <p:nvSpPr>
-          <p:cNvPr id="3" name="TextBox 2"/>
-          <p:cNvSpPr txBox="1"/>
-          <p:nvPr/>
-        </p:nvSpPr>
-        <p:spPr>
-          <a:xfrm>
-            <a:off x="640080" y="1828800"/>
-            <a:ext cx="10881360" cy="365760"/>
-          </a:xfrm>
-          <a:prstGeom prst="rect">
-            <a:avLst/>
-          </a:prstGeom>
-          <a:noFill/>
-        </p:spPr>
-        <p:txBody>
-          <a:bodyPr wrap="square">
-            <a:spAutoFit/>
-          </a:bodyPr>
-          <a:lstStyle/>
-          <a:p>
-            <a:pPr algn="l">
-              <a:lnSpc>
-                <a:spcPct val="115000"/>
-              </a:lnSpc>
-            </a:pPr>
-            <a:r>
-              <a:rPr sz="1300" b="1" i="0">
-                <a:solidFill>
-                  <a:srgbClr val="C85526"/>
-                </a:solidFill>
-                <a:latin typeface="Calibri"/>
-              </a:rPr>
-              <a:t>STREAMVIEW ANALYTICS · ETAPA 1</a:t>
-            </a:r>
-          </a:p>
-        </p:txBody>
-      </p:sp>
-      <p:sp>
-        <p:nvSpPr>
-          <p:cNvPr id="4" name="TextBox 3"/>
-          <p:cNvSpPr txBox="1"/>
-          <p:nvPr/>
-        </p:nvSpPr>
-        <p:spPr>
-          <a:xfrm>
-            <a:off x="640080" y="2286000"/>
-            <a:ext cx="10881360" cy="2011680"/>
-          </a:xfrm>
-          <a:prstGeom prst="rect">
-            <a:avLst/>
-          </a:prstGeom>
-          <a:noFill/>
-        </p:spPr>
-        <p:txBody>
-          <a:bodyPr wrap="square">
-            <a:spAutoFit/>
-          </a:bodyPr>
-          <a:lstStyle/>
-          <a:p>
-            <a:pPr algn="l">
-              <a:lnSpc>
-                <a:spcPct val="115000"/>
-              </a:lnSpc>
-            </a:pPr>
-            <a:r>
-              <a:rPr sz="4400" b="1" i="0">
-                <a:solidFill>
-                  <a:srgbClr val="15150F"/>
-                </a:solidFill>
-                <a:latin typeface="Calibri"/>
-              </a:rPr>
-              <a:t>¿Qué hace que un título sea popular en Netflix?</a:t>
-            </a:r>
-          </a:p>
-        </p:txBody>
-      </p:sp>
-      <p:sp>
-        <p:nvSpPr>
-          <p:cNvPr id="5" name="TextBox 4"/>
-          <p:cNvSpPr txBox="1"/>
-          <p:nvPr/>
-        </p:nvSpPr>
-        <p:spPr>
-          <a:xfrm>
-            <a:off x="640080" y="4206240"/>
-            <a:ext cx="10881360" cy="914400"/>
-          </a:xfrm>
-          <a:prstGeom prst="rect">
-            <a:avLst/>
-          </a:prstGeom>
-          <a:noFill/>
-        </p:spPr>
-        <p:txBody>
-          <a:bodyPr wrap="square">
-            <a:spAutoFit/>
-          </a:bodyPr>
-          <a:lstStyle/>
-          <a:p>
-            <a:pPr algn="l">
-              <a:lnSpc>
-                <a:spcPct val="115000"/>
-              </a:lnSpc>
-            </a:pPr>
-            <a:r>
-              <a:rPr sz="1700" b="0" i="0" dirty="0">
-                <a:solidFill>
-                  <a:srgbClr val="5B594C"/>
-                </a:solidFill>
-                <a:latin typeface="Calibri"/>
-              </a:rPr>
-              <a:t>31.991 </a:t>
-            </a:r>
-            <a:r>
-              <a:rPr sz="1700" b="0" i="0" dirty="0" err="1">
-                <a:solidFill>
-                  <a:srgbClr val="5B594C"/>
-                </a:solidFill>
-                <a:latin typeface="Calibri"/>
-              </a:rPr>
-              <a:t>títulos</a:t>
-            </a:r>
-            <a:r>
-              <a:rPr sz="1700" b="0" i="0" dirty="0">
-                <a:solidFill>
-                  <a:srgbClr val="5B594C"/>
-                </a:solidFill>
-                <a:latin typeface="Calibri"/>
-              </a:rPr>
-              <a:t>. Una </a:t>
-            </a:r>
-            <a:r>
-              <a:rPr sz="1700" b="0" i="0" dirty="0" err="1">
-                <a:solidFill>
-                  <a:srgbClr val="5B594C"/>
-                </a:solidFill>
-                <a:latin typeface="Calibri"/>
-              </a:rPr>
-              <a:t>pregunta</a:t>
-            </a:r>
-            <a:r>
-              <a:rPr sz="1700" b="0" i="0" dirty="0">
-                <a:solidFill>
-                  <a:srgbClr val="5B594C"/>
-                </a:solidFill>
-                <a:latin typeface="Calibri"/>
-              </a:rPr>
-              <a:t> con </a:t>
-            </a:r>
-            <a:r>
-              <a:rPr sz="1700" b="0" i="0" dirty="0" err="1">
-                <a:solidFill>
-                  <a:srgbClr val="5B594C"/>
-                </a:solidFill>
-                <a:latin typeface="Calibri"/>
-              </a:rPr>
-              <a:t>una</a:t>
-            </a:r>
-            <a:r>
-              <a:rPr sz="1700" b="0" i="0" dirty="0">
-                <a:solidFill>
-                  <a:srgbClr val="5B594C"/>
-                </a:solidFill>
-                <a:latin typeface="Calibri"/>
-              </a:rPr>
-              <a:t> </a:t>
-            </a:r>
-            <a:r>
-              <a:rPr sz="1700" b="0" i="0" dirty="0" err="1">
-                <a:solidFill>
-                  <a:srgbClr val="5B594C"/>
-                </a:solidFill>
-                <a:latin typeface="Calibri"/>
-              </a:rPr>
-              <a:t>respuesta</a:t>
-            </a:r>
-            <a:r>
-              <a:rPr sz="1700" b="0" i="0" dirty="0">
-                <a:solidFill>
-                  <a:srgbClr val="5B594C"/>
-                </a:solidFill>
-                <a:latin typeface="Calibri"/>
-              </a:rPr>
-              <a:t> </a:t>
-            </a:r>
-            <a:r>
-              <a:rPr sz="1700" b="0" i="0" dirty="0" err="1">
-                <a:solidFill>
-                  <a:srgbClr val="5B594C"/>
-                </a:solidFill>
-                <a:latin typeface="Calibri"/>
-              </a:rPr>
-              <a:t>que</a:t>
-            </a:r>
-            <a:r>
-              <a:rPr sz="1700" b="0" i="0" dirty="0">
-                <a:solidFill>
-                  <a:srgbClr val="5B594C"/>
-                </a:solidFill>
-                <a:latin typeface="Calibri"/>
-              </a:rPr>
-              <a:t> no es la </a:t>
-            </a:r>
-            <a:r>
-              <a:rPr sz="1700" b="0" i="0" dirty="0" err="1">
-                <a:solidFill>
-                  <a:srgbClr val="5B594C"/>
-                </a:solidFill>
-                <a:latin typeface="Calibri"/>
-              </a:rPr>
-              <a:t>que</a:t>
-            </a:r>
-            <a:r>
-              <a:rPr sz="1700" b="0" i="0" dirty="0">
-                <a:solidFill>
-                  <a:srgbClr val="5B594C"/>
-                </a:solidFill>
-                <a:latin typeface="Calibri"/>
-              </a:rPr>
-              <a:t> se </a:t>
-            </a:r>
-            <a:r>
-              <a:rPr sz="1700" b="0" i="0" dirty="0" err="1">
-                <a:solidFill>
-                  <a:srgbClr val="5B594C"/>
-                </a:solidFill>
-                <a:latin typeface="Calibri"/>
-              </a:rPr>
-              <a:t>espera</a:t>
-            </a:r>
-            <a:r>
-              <a:rPr sz="1700" b="0" i="0" dirty="0">
-                <a:solidFill>
-                  <a:srgbClr val="5B594C"/>
-                </a:solidFill>
-                <a:latin typeface="Calibri"/>
-              </a:rPr>
-              <a:t>.</a:t>
-            </a:r>
-          </a:p>
-        </p:txBody>
-      </p:sp>
       <p:pic>
         <p:nvPicPr>
-          <p:cNvPr id="6" name="Picture 5" descr="Archivo:Logo DuocUC.svg - Wikipedia, la enciclopedia libre">
-            <a:extLst>
-              <a:ext uri="{FF2B5EF4-FFF2-40B4-BE49-F238E27FC236}">
-                <a16:creationId xmlns:a16="http://schemas.microsoft.com/office/drawing/2014/main" id="{E338B0EC-202D-7DD0-F852-BDAB5081D0A8}"/>
-              </a:ext>
-            </a:extLst>
-          </p:cNvPr>
+          <p:cNvPr id="3" name="Picture 2" descr="duoc_logo.png"/>
           <p:cNvPicPr>
             <a:picLocks noChangeAspect="1"/>
           </p:cNvPicPr>
@@ -4592,8 +4430,8 @@
         </p:blipFill>
         <p:spPr>
           <a:xfrm>
-            <a:off x="640080" y="510685"/>
-            <a:ext cx="4028378" cy="990310"/>
+            <a:off x="640080" y="512064"/>
+            <a:ext cx="2377440" cy="584454"/>
           </a:xfrm>
           <a:prstGeom prst="rect">
             <a:avLst/>
@@ -4602,20 +4440,14 @@
       </p:pic>
       <p:sp>
         <p:nvSpPr>
-          <p:cNvPr id="8" name="TextBox 7">
-            <a:extLst>
-              <a:ext uri="{FF2B5EF4-FFF2-40B4-BE49-F238E27FC236}">
-                <a16:creationId xmlns:a16="http://schemas.microsoft.com/office/drawing/2014/main" id="{88D2B048-4746-8F87-1D6A-C9C66CACF91D}"/>
-              </a:ext>
-            </a:extLst>
-          </p:cNvPr>
+          <p:cNvPr id="4" name="TextBox 3"/>
           <p:cNvSpPr txBox="1"/>
           <p:nvPr/>
         </p:nvSpPr>
         <p:spPr>
           <a:xfrm>
-            <a:off x="640080" y="4722541"/>
-            <a:ext cx="10881360" cy="375552"/>
+            <a:off x="640080" y="1828800"/>
+            <a:ext cx="10881360" cy="365760"/>
           </a:xfrm>
           <a:prstGeom prst="rect">
             <a:avLst/>
@@ -4634,20 +4466,257 @@
               </a:lnSpc>
             </a:pPr>
             <a:r>
-              <a:rPr lang="es-419" sz="1700" b="0" i="0" dirty="0">
+              <a:rPr sz="1300" b="1">
+                <a:solidFill>
+                  <a:srgbClr val="C85526"/>
+                </a:solidFill>
+                <a:latin typeface="Calibri"/>
+              </a:rPr>
+              <a:t>STREAMVIEW ANALYTICS · ETAPA 1</a:t>
+            </a:r>
+          </a:p>
+        </p:txBody>
+      </p:sp>
+      <p:sp>
+        <p:nvSpPr>
+          <p:cNvPr id="5" name="TextBox 4"/>
+          <p:cNvSpPr txBox="1"/>
+          <p:nvPr/>
+        </p:nvSpPr>
+        <p:spPr>
+          <a:xfrm>
+            <a:off x="640080" y="2286000"/>
+            <a:ext cx="10881360" cy="2011680"/>
+          </a:xfrm>
+          <a:prstGeom prst="rect">
+            <a:avLst/>
+          </a:prstGeom>
+          <a:noFill/>
+        </p:spPr>
+        <p:txBody>
+          <a:bodyPr wrap="square">
+            <a:spAutoFit/>
+          </a:bodyPr>
+          <a:lstStyle/>
+          <a:p>
+            <a:pPr algn="l">
+              <a:lnSpc>
+                <a:spcPct val="105000"/>
+              </a:lnSpc>
+            </a:pPr>
+            <a:r>
+              <a:rPr sz="4000" b="1">
+                <a:solidFill>
+                  <a:srgbClr val="15150F"/>
+                </a:solidFill>
+                <a:latin typeface="Calibri"/>
+              </a:rPr>
+              <a:t>¿Qué hace que un título sea popular en Netflix?</a:t>
+            </a:r>
+          </a:p>
+        </p:txBody>
+      </p:sp>
+      <p:sp>
+        <p:nvSpPr>
+          <p:cNvPr id="6" name="TextBox 5"/>
+          <p:cNvSpPr txBox="1"/>
+          <p:nvPr/>
+        </p:nvSpPr>
+        <p:spPr>
+          <a:xfrm>
+            <a:off x="640080" y="4206240"/>
+            <a:ext cx="10881360" cy="914400"/>
+          </a:xfrm>
+          <a:prstGeom prst="rect">
+            <a:avLst/>
+          </a:prstGeom>
+          <a:noFill/>
+        </p:spPr>
+        <p:txBody>
+          <a:bodyPr wrap="square">
+            <a:spAutoFit/>
+          </a:bodyPr>
+          <a:lstStyle/>
+          <a:p>
+            <a:pPr algn="l">
+              <a:lnSpc>
+                <a:spcPct val="130000"/>
+              </a:lnSpc>
+            </a:pPr>
+            <a:r>
+              <a:rPr sz="1600" b="0" dirty="0">
                 <a:solidFill>
                   <a:srgbClr val="5B594C"/>
+                </a:solidFill>
+                <a:latin typeface="Calibri"/>
+              </a:rPr>
+              <a:t>31.991 </a:t>
+            </a:r>
+            <a:r>
+              <a:rPr sz="1600" b="0" dirty="0" err="1">
+                <a:solidFill>
+                  <a:srgbClr val="5B594C"/>
+                </a:solidFill>
+                <a:latin typeface="Calibri"/>
+              </a:rPr>
+              <a:t>títulos</a:t>
+            </a:r>
+            <a:r>
+              <a:rPr sz="1600" b="0" dirty="0">
+                <a:solidFill>
+                  <a:srgbClr val="5B594C"/>
+                </a:solidFill>
+                <a:latin typeface="Calibri"/>
+              </a:rPr>
+              <a:t>. Una </a:t>
+            </a:r>
+            <a:r>
+              <a:rPr sz="1600" b="0" dirty="0" err="1">
+                <a:solidFill>
+                  <a:srgbClr val="5B594C"/>
+                </a:solidFill>
+                <a:latin typeface="Calibri"/>
+              </a:rPr>
+              <a:t>pregunta</a:t>
+            </a:r>
+            <a:r>
+              <a:rPr sz="1600" b="0" dirty="0">
+                <a:solidFill>
+                  <a:srgbClr val="5B594C"/>
+                </a:solidFill>
+                <a:latin typeface="Calibri"/>
+              </a:rPr>
+              <a:t> con </a:t>
+            </a:r>
+            <a:r>
+              <a:rPr sz="1600" b="0" dirty="0" err="1">
+                <a:solidFill>
+                  <a:srgbClr val="5B594C"/>
+                </a:solidFill>
+                <a:latin typeface="Calibri"/>
+              </a:rPr>
+              <a:t>una</a:t>
+            </a:r>
+            <a:r>
+              <a:rPr sz="1600" b="0" dirty="0">
+                <a:solidFill>
+                  <a:srgbClr val="5B594C"/>
+                </a:solidFill>
+                <a:latin typeface="Calibri"/>
+              </a:rPr>
+              <a:t> </a:t>
+            </a:r>
+            <a:r>
+              <a:rPr sz="1600" b="0" dirty="0" err="1">
+                <a:solidFill>
+                  <a:srgbClr val="5B594C"/>
+                </a:solidFill>
+                <a:latin typeface="Calibri"/>
+              </a:rPr>
+              <a:t>respuesta</a:t>
+            </a:r>
+            <a:r>
+              <a:rPr sz="1600" b="0" dirty="0">
+                <a:solidFill>
+                  <a:srgbClr val="5B594C"/>
+                </a:solidFill>
+                <a:latin typeface="Calibri"/>
+              </a:rPr>
+              <a:t> </a:t>
+            </a:r>
+            <a:r>
+              <a:rPr sz="1600" b="0" dirty="0" err="1">
+                <a:solidFill>
+                  <a:srgbClr val="5B594C"/>
+                </a:solidFill>
+                <a:latin typeface="Calibri"/>
+              </a:rPr>
+              <a:t>que</a:t>
+            </a:r>
+            <a:r>
+              <a:rPr sz="1600" b="0" dirty="0">
+                <a:solidFill>
+                  <a:srgbClr val="5B594C"/>
+                </a:solidFill>
+                <a:latin typeface="Calibri"/>
+              </a:rPr>
+              <a:t> no es la </a:t>
+            </a:r>
+            <a:r>
+              <a:rPr sz="1600" b="0" dirty="0" err="1">
+                <a:solidFill>
+                  <a:srgbClr val="5B594C"/>
+                </a:solidFill>
+                <a:latin typeface="Calibri"/>
+              </a:rPr>
+              <a:t>que</a:t>
+            </a:r>
+            <a:r>
+              <a:rPr sz="1600" b="0" dirty="0">
+                <a:solidFill>
+                  <a:srgbClr val="5B594C"/>
+                </a:solidFill>
+                <a:latin typeface="Calibri"/>
+              </a:rPr>
+              <a:t> se </a:t>
+            </a:r>
+            <a:r>
+              <a:rPr sz="1600" b="0" dirty="0" err="1">
+                <a:solidFill>
+                  <a:srgbClr val="5B594C"/>
+                </a:solidFill>
+                <a:latin typeface="Calibri"/>
+              </a:rPr>
+              <a:t>espera</a:t>
+            </a:r>
+            <a:r>
+              <a:rPr sz="1600" b="0" dirty="0">
+                <a:solidFill>
+                  <a:srgbClr val="5B594C"/>
+                </a:solidFill>
+                <a:latin typeface="Calibri"/>
+              </a:rPr>
+              <a:t>.</a:t>
+            </a:r>
+          </a:p>
+        </p:txBody>
+      </p:sp>
+      <p:sp>
+        <p:nvSpPr>
+          <p:cNvPr id="7" name="TextBox 6"/>
+          <p:cNvSpPr txBox="1"/>
+          <p:nvPr/>
+        </p:nvSpPr>
+        <p:spPr>
+          <a:xfrm>
+            <a:off x="640080" y="4718304"/>
+            <a:ext cx="10881360" cy="374904"/>
+          </a:xfrm>
+          <a:prstGeom prst="rect">
+            <a:avLst/>
+          </a:prstGeom>
+          <a:noFill/>
+        </p:spPr>
+        <p:txBody>
+          <a:bodyPr wrap="square">
+            <a:spAutoFit/>
+          </a:bodyPr>
+          <a:lstStyle/>
+          <a:p>
+            <a:pPr algn="l">
+              <a:lnSpc>
+                <a:spcPct val="115000"/>
+              </a:lnSpc>
+            </a:pPr>
+            <a:r>
+              <a:rPr sz="1200" b="0">
+                <a:solidFill>
+                  <a:srgbClr val="918F7F"/>
                 </a:solidFill>
                 <a:latin typeface="Calibri"/>
               </a:rPr>
               <a:t>Felipe Ahumada Silva – Francisca Carrasco Lozano</a:t>
             </a:r>
-            <a:endParaRPr sz="1700" b="0" i="0" dirty="0">
-              <a:solidFill>
-                <a:srgbClr val="5B594C"/>
-              </a:solidFill>
-              <a:latin typeface="Calibri"/>
-            </a:endParaRPr>
           </a:p>
         </p:txBody>
       </p:sp>
@@ -4684,7 +4753,7 @@
         </p:nvSpPr>
         <p:spPr>
           <a:xfrm>
-            <a:off x="0" y="0"/>
+            <a:off x="305" y="0"/>
             <a:ext cx="12191695" cy="6858000"/>
           </a:xfrm>
           <a:prstGeom prst="rect">
@@ -4717,7 +4786,7 @@
           <a:lstStyle/>
           <a:p>
             <a:pPr algn="ctr"/>
-            <a:endParaRPr/>
+            <a:endParaRPr dirty="0"/>
           </a:p>
         </p:txBody>
       </p:sp>
@@ -4749,13 +4818,13 @@
               </a:lnSpc>
             </a:pPr>
             <a:r>
-              <a:rPr sz="1300" b="1" i="0">
+              <a:rPr sz="1300" b="1">
                 <a:solidFill>
                   <a:srgbClr val="C85526"/>
                 </a:solidFill>
                 <a:latin typeface="Calibri"/>
               </a:rPr>
-              <a:t>EVIDENCIA 2 DE 4</a:t>
+              <a:t>EVIDENCIA 3 DE 4</a:t>
             </a:r>
           </a:p>
         </p:txBody>
@@ -4788,20 +4857,20 @@
               </a:lnSpc>
             </a:pPr>
             <a:r>
-              <a:rPr sz="3000" b="1" i="0">
+              <a:rPr sz="3000" b="1">
                 <a:solidFill>
                   <a:srgbClr val="15150F"/>
                 </a:solidFill>
                 <a:latin typeface="Calibri"/>
               </a:rPr>
-              <a:t>Los géneros más populares son los peor evaluados</a:t>
+              <a:t>Nicho contra blockbuster, dos rankings que no se cruzan</a:t>
             </a:r>
           </a:p>
         </p:txBody>
       </p:sp>
       <p:pic>
         <p:nvPicPr>
-          <p:cNvPr id="5" name="Picture 4" descr="v16_calificacion_por_genero.png"/>
+          <p:cNvPr id="5" name="Picture 4" descr="v14_top10_mejor_evaluados.png"/>
           <p:cNvPicPr>
             <a:picLocks noChangeAspect="1"/>
           </p:cNvPicPr>
@@ -4815,33 +4884,70 @@
         </p:blipFill>
         <p:spPr>
           <a:xfrm>
-            <a:off x="2103120" y="1600200"/>
-            <a:ext cx="7955279" cy="4454956"/>
+            <a:off x="1466773" y="1423850"/>
+            <a:ext cx="9136533" cy="5046847"/>
           </a:xfrm>
           <a:prstGeom prst="rect">
             <a:avLst/>
           </a:prstGeom>
         </p:spPr>
       </p:pic>
-      <p:sp>
-        <p:nvSpPr>
-          <p:cNvPr id="6" name="Rectangle 5"/>
+    </p:spTree>
+  </p:cSld>
+  <p:clrMapOvr>
+    <a:masterClrMapping/>
+  </p:clrMapOvr>
+</p:sld>
+</file>
+
+<file path=ppt/slides/slide11.xml><?xml version="1.0" encoding="utf-8"?>
+<p:sld xmlns:a="http://schemas.openxmlformats.org/drawingml/2006/main" xmlns:r="http://schemas.openxmlformats.org/officeDocument/2006/relationships" xmlns:p="http://schemas.openxmlformats.org/presentationml/2006/main">
+  <p:cSld>
+    <p:spTree>
+      <p:nvGrpSpPr>
+        <p:cNvPr id="1" name="">
+          <a:extLst>
+            <a:ext uri="{FF2B5EF4-FFF2-40B4-BE49-F238E27FC236}">
+              <a16:creationId xmlns:a16="http://schemas.microsoft.com/office/drawing/2014/main" id="{86A0F11A-D5F6-2014-6CF2-028179E7B058}"/>
+            </a:ext>
+          </a:extLst>
+        </p:cNvPr>
+        <p:cNvGrpSpPr/>
+        <p:nvPr/>
+      </p:nvGrpSpPr>
+      <p:grpSpPr>
+        <a:xfrm>
+          <a:off x="0" y="0"/>
+          <a:ext cx="0" cy="0"/>
+          <a:chOff x="0" y="0"/>
+          <a:chExt cx="0" cy="0"/>
+        </a:xfrm>
+      </p:grpSpPr>
+      <p:sp>
+        <p:nvSpPr>
+          <p:cNvPr id="2" name="Rectangle 1">
+            <a:extLst>
+              <a:ext uri="{FF2B5EF4-FFF2-40B4-BE49-F238E27FC236}">
+                <a16:creationId xmlns:a16="http://schemas.microsoft.com/office/drawing/2014/main" id="{48EF0530-DA21-2577-83ED-14ABEE067253}"/>
+              </a:ext>
+            </a:extLst>
+          </p:cNvPr>
           <p:cNvSpPr/>
           <p:nvPr/>
         </p:nvSpPr>
         <p:spPr>
           <a:xfrm>
-            <a:off x="2103120" y="1600200"/>
-            <a:ext cx="7955279" cy="4454956"/>
+            <a:off x="305" y="0"/>
+            <a:ext cx="12191695" cy="6858000"/>
           </a:xfrm>
           <a:prstGeom prst="rect">
             <a:avLst/>
           </a:prstGeom>
-          <a:noFill/>
-          <a:ln w="9525">
-            <a:solidFill>
-              <a:srgbClr val="DDD8C6"/>
-            </a:solidFill>
+          <a:solidFill>
+            <a:srgbClr val="F6F4EE"/>
+          </a:solidFill>
+          <a:ln>
+            <a:noFill/>
           </a:ln>
           <a:effectLst/>
         </p:spPr>
@@ -4868,79 +4974,15 @@
           </a:p>
         </p:txBody>
       </p:sp>
-    </p:spTree>
-  </p:cSld>
-  <p:clrMapOvr>
-    <a:masterClrMapping/>
-  </p:clrMapOvr>
-</p:sld>
-</file>
-
-<file path=ppt/slides/slide11.xml><?xml version="1.0" encoding="utf-8"?>
-<p:sld xmlns:a="http://schemas.openxmlformats.org/drawingml/2006/main" xmlns:r="http://schemas.openxmlformats.org/officeDocument/2006/relationships" xmlns:p="http://schemas.openxmlformats.org/presentationml/2006/main">
-  <p:cSld>
-    <p:spTree>
-      <p:nvGrpSpPr>
-        <p:cNvPr id="1" name=""/>
-        <p:cNvGrpSpPr/>
-        <p:nvPr/>
-      </p:nvGrpSpPr>
-      <p:grpSpPr>
-        <a:xfrm>
-          <a:off x="0" y="0"/>
-          <a:ext cx="0" cy="0"/>
-          <a:chOff x="0" y="0"/>
-          <a:chExt cx="0" cy="0"/>
-        </a:xfrm>
-      </p:grpSpPr>
-      <p:sp>
-        <p:nvSpPr>
-          <p:cNvPr id="2" name="Rectangle 1"/>
-          <p:cNvSpPr/>
-          <p:nvPr/>
-        </p:nvSpPr>
-        <p:spPr>
-          <a:xfrm>
-            <a:off x="0" y="0"/>
-            <a:ext cx="12191695" cy="6858000"/>
-          </a:xfrm>
-          <a:prstGeom prst="rect">
-            <a:avLst/>
-          </a:prstGeom>
-          <a:solidFill>
-            <a:srgbClr val="F6F4EE"/>
-          </a:solidFill>
-          <a:ln>
-            <a:noFill/>
-          </a:ln>
-          <a:effectLst/>
-        </p:spPr>
-        <p:style>
-          <a:lnRef idx="1">
-            <a:schemeClr val="accent1"/>
-          </a:lnRef>
-          <a:fillRef idx="3">
-            <a:schemeClr val="accent1"/>
-          </a:fillRef>
-          <a:effectRef idx="2">
-            <a:schemeClr val="accent1"/>
-          </a:effectRef>
-          <a:fontRef idx="minor">
-            <a:schemeClr val="lt1"/>
-          </a:fontRef>
-        </p:style>
-        <p:txBody>
-          <a:bodyPr rtlCol="0" anchor="ctr"/>
-          <a:lstStyle/>
-          <a:p>
-            <a:pPr algn="ctr"/>
-            <a:endParaRPr/>
-          </a:p>
-        </p:txBody>
-      </p:sp>
-      <p:sp>
-        <p:nvSpPr>
-          <p:cNvPr id="3" name="TextBox 2"/>
+      <p:sp>
+        <p:nvSpPr>
+          <p:cNvPr id="3" name="TextBox 2">
+            <a:extLst>
+              <a:ext uri="{FF2B5EF4-FFF2-40B4-BE49-F238E27FC236}">
+                <a16:creationId xmlns:a16="http://schemas.microsoft.com/office/drawing/2014/main" id="{83023040-1DB7-0C95-65DC-27A5F1BC8D39}"/>
+              </a:ext>
+            </a:extLst>
+          </p:cNvPr>
           <p:cNvSpPr txBox="1"/>
           <p:nvPr/>
         </p:nvSpPr>
@@ -4966,7 +5008,7 @@
               </a:lnSpc>
             </a:pPr>
             <a:r>
-              <a:rPr sz="1300" b="1" i="0">
+              <a:rPr sz="1300" b="1">
                 <a:solidFill>
                   <a:srgbClr val="C85526"/>
                 </a:solidFill>
@@ -4979,7 +5021,13 @@
       </p:sp>
       <p:sp>
         <p:nvSpPr>
-          <p:cNvPr id="4" name="TextBox 3"/>
+          <p:cNvPr id="4" name="TextBox 3">
+            <a:extLst>
+              <a:ext uri="{FF2B5EF4-FFF2-40B4-BE49-F238E27FC236}">
+                <a16:creationId xmlns:a16="http://schemas.microsoft.com/office/drawing/2014/main" id="{9C0941BA-7D34-97BA-50A2-CDA9127C41B8}"/>
+              </a:ext>
+            </a:extLst>
+          </p:cNvPr>
           <p:cNvSpPr txBox="1"/>
           <p:nvPr/>
         </p:nvSpPr>
@@ -5005,7 +5053,7 @@
               </a:lnSpc>
             </a:pPr>
             <a:r>
-              <a:rPr sz="3000" b="1" i="0">
+              <a:rPr sz="3000" b="1">
                 <a:solidFill>
                   <a:srgbClr val="15150F"/>
                 </a:solidFill>
@@ -5018,7 +5066,13 @@
       </p:sp>
       <p:pic>
         <p:nvPicPr>
-          <p:cNvPr id="5" name="Picture 4" descr="v14_top10_mejor_evaluados.png"/>
+          <p:cNvPr id="7" name="Picture 6" descr="v15_top10_mas_votados.png">
+            <a:extLst>
+              <a:ext uri="{FF2B5EF4-FFF2-40B4-BE49-F238E27FC236}">
+                <a16:creationId xmlns:a16="http://schemas.microsoft.com/office/drawing/2014/main" id="{397C5BB7-147F-415E-494D-6DADE5F0E327}"/>
+              </a:ext>
+            </a:extLst>
+          </p:cNvPr>
           <p:cNvPicPr>
             <a:picLocks noChangeAspect="1"/>
           </p:cNvPicPr>
@@ -5032,129 +5086,20 @@
         </p:blipFill>
         <p:spPr>
           <a:xfrm>
-            <a:off x="457200" y="1737360"/>
-            <a:ext cx="5577840" cy="3081093"/>
+            <a:off x="1553859" y="1598023"/>
+            <a:ext cx="8962361" cy="4950638"/>
           </a:xfrm>
           <a:prstGeom prst="rect">
             <a:avLst/>
           </a:prstGeom>
         </p:spPr>
       </p:pic>
-      <p:sp>
-        <p:nvSpPr>
-          <p:cNvPr id="6" name="Rectangle 5"/>
-          <p:cNvSpPr/>
-          <p:nvPr/>
-        </p:nvSpPr>
-        <p:spPr>
-          <a:xfrm>
-            <a:off x="457200" y="1737360"/>
-            <a:ext cx="5577840" cy="3081093"/>
-          </a:xfrm>
-          <a:prstGeom prst="rect">
-            <a:avLst/>
-          </a:prstGeom>
-          <a:noFill/>
-          <a:ln w="9525">
-            <a:solidFill>
-              <a:srgbClr val="DDD8C6"/>
-            </a:solidFill>
-          </a:ln>
-          <a:effectLst/>
-        </p:spPr>
-        <p:style>
-          <a:lnRef idx="1">
-            <a:schemeClr val="accent1"/>
-          </a:lnRef>
-          <a:fillRef idx="3">
-            <a:schemeClr val="accent1"/>
-          </a:fillRef>
-          <a:effectRef idx="2">
-            <a:schemeClr val="accent1"/>
-          </a:effectRef>
-          <a:fontRef idx="minor">
-            <a:schemeClr val="lt1"/>
-          </a:fontRef>
-        </p:style>
-        <p:txBody>
-          <a:bodyPr rtlCol="0" anchor="ctr"/>
-          <a:lstStyle/>
-          <a:p>
-            <a:pPr algn="ctr"/>
-            <a:endParaRPr/>
-          </a:p>
-        </p:txBody>
-      </p:sp>
-      <p:pic>
-        <p:nvPicPr>
-          <p:cNvPr id="7" name="Picture 6" descr="v15_top10_mas_votados.png"/>
-          <p:cNvPicPr>
-            <a:picLocks noChangeAspect="1"/>
-          </p:cNvPicPr>
-          <p:nvPr/>
-        </p:nvPicPr>
-        <p:blipFill>
-          <a:blip r:embed="rId4"/>
-          <a:stretch>
-            <a:fillRect/>
-          </a:stretch>
-        </p:blipFill>
-        <p:spPr>
-          <a:xfrm>
-            <a:off x="6172200" y="1737360"/>
-            <a:ext cx="5577840" cy="3081093"/>
-          </a:xfrm>
-          <a:prstGeom prst="rect">
-            <a:avLst/>
-          </a:prstGeom>
-        </p:spPr>
-      </p:pic>
-      <p:sp>
-        <p:nvSpPr>
-          <p:cNvPr id="8" name="Rectangle 7"/>
-          <p:cNvSpPr/>
-          <p:nvPr/>
-        </p:nvSpPr>
-        <p:spPr>
-          <a:xfrm>
-            <a:off x="6172200" y="1737360"/>
-            <a:ext cx="5577840" cy="3081093"/>
-          </a:xfrm>
-          <a:prstGeom prst="rect">
-            <a:avLst/>
-          </a:prstGeom>
-          <a:noFill/>
-          <a:ln w="9525">
-            <a:solidFill>
-              <a:srgbClr val="DDD8C6"/>
-            </a:solidFill>
-          </a:ln>
-          <a:effectLst/>
-        </p:spPr>
-        <p:style>
-          <a:lnRef idx="1">
-            <a:schemeClr val="accent1"/>
-          </a:lnRef>
-          <a:fillRef idx="3">
-            <a:schemeClr val="accent1"/>
-          </a:fillRef>
-          <a:effectRef idx="2">
-            <a:schemeClr val="accent1"/>
-          </a:effectRef>
-          <a:fontRef idx="minor">
-            <a:schemeClr val="lt1"/>
-          </a:fontRef>
-        </p:style>
-        <p:txBody>
-          <a:bodyPr rtlCol="0" anchor="ctr"/>
-          <a:lstStyle/>
-          <a:p>
-            <a:pPr algn="ctr"/>
-            <a:endParaRPr/>
-          </a:p>
-        </p:txBody>
-      </p:sp>
     </p:spTree>
+    <p:extLst>
+      <p:ext uri="{BB962C8B-B14F-4D97-AF65-F5344CB8AC3E}">
+        <p14:creationId xmlns:p14="http://schemas.microsoft.com/office/powerpoint/2010/main" val="534799149"/>
+      </p:ext>
+    </p:extLst>
   </p:cSld>
   <p:clrMapOvr>
     <a:masterClrMapping/>
@@ -5187,7 +5132,7 @@
         </p:nvSpPr>
         <p:spPr>
           <a:xfrm>
-            <a:off x="0" y="0"/>
+            <a:off x="305" y="0"/>
             <a:ext cx="12191695" cy="6858000"/>
           </a:xfrm>
           <a:prstGeom prst="rect">
@@ -5220,7 +5165,7 @@
           <a:lstStyle/>
           <a:p>
             <a:pPr algn="ctr"/>
-            <a:endParaRPr/>
+            <a:endParaRPr dirty="0"/>
           </a:p>
         </p:txBody>
       </p:sp>
@@ -5252,7 +5197,7 @@
               </a:lnSpc>
             </a:pPr>
             <a:r>
-              <a:rPr sz="1300" b="1" i="0">
+              <a:rPr sz="1300" b="1">
                 <a:solidFill>
                   <a:srgbClr val="C85526"/>
                 </a:solidFill>
@@ -5291,7 +5236,7 @@
               </a:lnSpc>
             </a:pPr>
             <a:r>
-              <a:rPr sz="3000" b="1" i="0">
+              <a:rPr sz="3000" b="1">
                 <a:solidFill>
                   <a:srgbClr val="15150F"/>
                 </a:solidFill>
@@ -5318,33 +5263,70 @@
         </p:blipFill>
         <p:spPr>
           <a:xfrm>
-            <a:off x="457200" y="1737360"/>
-            <a:ext cx="5577840" cy="3123590"/>
+            <a:off x="1632237" y="1545770"/>
+            <a:ext cx="8805606" cy="4931139"/>
           </a:xfrm>
           <a:prstGeom prst="rect">
             <a:avLst/>
           </a:prstGeom>
         </p:spPr>
       </p:pic>
-      <p:sp>
-        <p:nvSpPr>
-          <p:cNvPr id="6" name="Rectangle 5"/>
+    </p:spTree>
+  </p:cSld>
+  <p:clrMapOvr>
+    <a:masterClrMapping/>
+  </p:clrMapOvr>
+</p:sld>
+</file>
+
+<file path=ppt/slides/slide13.xml><?xml version="1.0" encoding="utf-8"?>
+<p:sld xmlns:a="http://schemas.openxmlformats.org/drawingml/2006/main" xmlns:r="http://schemas.openxmlformats.org/officeDocument/2006/relationships" xmlns:p="http://schemas.openxmlformats.org/presentationml/2006/main">
+  <p:cSld>
+    <p:spTree>
+      <p:nvGrpSpPr>
+        <p:cNvPr id="1" name="">
+          <a:extLst>
+            <a:ext uri="{FF2B5EF4-FFF2-40B4-BE49-F238E27FC236}">
+              <a16:creationId xmlns:a16="http://schemas.microsoft.com/office/drawing/2014/main" id="{7EFBD07D-726F-F39A-B90D-FF992BB1E4EF}"/>
+            </a:ext>
+          </a:extLst>
+        </p:cNvPr>
+        <p:cNvGrpSpPr/>
+        <p:nvPr/>
+      </p:nvGrpSpPr>
+      <p:grpSpPr>
+        <a:xfrm>
+          <a:off x="0" y="0"/>
+          <a:ext cx="0" cy="0"/>
+          <a:chOff x="0" y="0"/>
+          <a:chExt cx="0" cy="0"/>
+        </a:xfrm>
+      </p:grpSpPr>
+      <p:sp>
+        <p:nvSpPr>
+          <p:cNvPr id="2" name="Rectangle 1">
+            <a:extLst>
+              <a:ext uri="{FF2B5EF4-FFF2-40B4-BE49-F238E27FC236}">
+                <a16:creationId xmlns:a16="http://schemas.microsoft.com/office/drawing/2014/main" id="{B6AED539-0946-FA93-8F6D-354779E2A3BF}"/>
+              </a:ext>
+            </a:extLst>
+          </p:cNvPr>
           <p:cNvSpPr/>
           <p:nvPr/>
         </p:nvSpPr>
         <p:spPr>
           <a:xfrm>
-            <a:off x="457200" y="1737360"/>
-            <a:ext cx="5577840" cy="3123590"/>
+            <a:off x="305" y="0"/>
+            <a:ext cx="12191695" cy="6858000"/>
           </a:xfrm>
           <a:prstGeom prst="rect">
             <a:avLst/>
           </a:prstGeom>
-          <a:noFill/>
-          <a:ln w="9525">
-            <a:solidFill>
-              <a:srgbClr val="DDD8C6"/>
-            </a:solidFill>
+          <a:solidFill>
+            <a:srgbClr val="F6F4EE"/>
+          </a:solidFill>
+          <a:ln>
+            <a:noFill/>
           </a:ln>
           <a:effectLst/>
         </p:spPr>
@@ -5371,614 +5353,132 @@
           </a:p>
         </p:txBody>
       </p:sp>
+      <p:sp>
+        <p:nvSpPr>
+          <p:cNvPr id="3" name="TextBox 2">
+            <a:extLst>
+              <a:ext uri="{FF2B5EF4-FFF2-40B4-BE49-F238E27FC236}">
+                <a16:creationId xmlns:a16="http://schemas.microsoft.com/office/drawing/2014/main" id="{CCACBF26-FB9B-2DA9-92CA-EE8B43A73BE7}"/>
+              </a:ext>
+            </a:extLst>
+          </p:cNvPr>
+          <p:cNvSpPr txBox="1"/>
+          <p:nvPr/>
+        </p:nvSpPr>
+        <p:spPr>
+          <a:xfrm>
+            <a:off x="640080" y="457200"/>
+            <a:ext cx="10881360" cy="365760"/>
+          </a:xfrm>
+          <a:prstGeom prst="rect">
+            <a:avLst/>
+          </a:prstGeom>
+          <a:noFill/>
+        </p:spPr>
+        <p:txBody>
+          <a:bodyPr wrap="square">
+            <a:spAutoFit/>
+          </a:bodyPr>
+          <a:lstStyle/>
+          <a:p>
+            <a:pPr algn="l">
+              <a:lnSpc>
+                <a:spcPct val="115000"/>
+              </a:lnSpc>
+            </a:pPr>
+            <a:r>
+              <a:rPr sz="1300" b="1">
+                <a:solidFill>
+                  <a:srgbClr val="C85526"/>
+                </a:solidFill>
+                <a:latin typeface="Calibri"/>
+              </a:rPr>
+              <a:t>EVIDENCIA 4 DE 4</a:t>
+            </a:r>
+          </a:p>
+        </p:txBody>
+      </p:sp>
+      <p:sp>
+        <p:nvSpPr>
+          <p:cNvPr id="4" name="TextBox 3">
+            <a:extLst>
+              <a:ext uri="{FF2B5EF4-FFF2-40B4-BE49-F238E27FC236}">
+                <a16:creationId xmlns:a16="http://schemas.microsoft.com/office/drawing/2014/main" id="{D3D00BB3-E73C-5E88-7D93-3269B41CADC7}"/>
+              </a:ext>
+            </a:extLst>
+          </p:cNvPr>
+          <p:cNvSpPr txBox="1"/>
+          <p:nvPr/>
+        </p:nvSpPr>
+        <p:spPr>
+          <a:xfrm>
+            <a:off x="640080" y="777240"/>
+            <a:ext cx="10881360" cy="1005840"/>
+          </a:xfrm>
+          <a:prstGeom prst="rect">
+            <a:avLst/>
+          </a:prstGeom>
+          <a:noFill/>
+        </p:spPr>
+        <p:txBody>
+          <a:bodyPr wrap="square">
+            <a:spAutoFit/>
+          </a:bodyPr>
+          <a:lstStyle/>
+          <a:p>
+            <a:pPr algn="l">
+              <a:lnSpc>
+                <a:spcPct val="115000"/>
+              </a:lnSpc>
+            </a:pPr>
+            <a:r>
+              <a:rPr sz="3000" b="1">
+                <a:solidFill>
+                  <a:srgbClr val="15150F"/>
+                </a:solidFill>
+                <a:latin typeface="Calibri"/>
+              </a:rPr>
+              <a:t>El mismo patrón se repite por país</a:t>
+            </a:r>
+          </a:p>
+        </p:txBody>
+      </p:sp>
       <p:pic>
         <p:nvPicPr>
-          <p:cNvPr id="7" name="Picture 6" descr="v13_calificacion_por_pais.png"/>
+          <p:cNvPr id="7" name="Picture 6" descr="v13_calificacion_por_pais.png">
+            <a:extLst>
+              <a:ext uri="{FF2B5EF4-FFF2-40B4-BE49-F238E27FC236}">
+                <a16:creationId xmlns:a16="http://schemas.microsoft.com/office/drawing/2014/main" id="{E8346089-A35A-1859-5C26-B9BDE6AB29CB}"/>
+              </a:ext>
+            </a:extLst>
+          </p:cNvPr>
           <p:cNvPicPr>
             <a:picLocks noChangeAspect="1"/>
           </p:cNvPicPr>
           <p:nvPr/>
         </p:nvPicPr>
         <p:blipFill>
-          <a:blip r:embed="rId4"/>
+          <a:blip r:embed="rId3"/>
           <a:stretch>
             <a:fillRect/>
           </a:stretch>
         </p:blipFill>
         <p:spPr>
           <a:xfrm>
-            <a:off x="6172200" y="1737360"/>
-            <a:ext cx="5577840" cy="3123590"/>
+            <a:off x="1541417" y="1476103"/>
+            <a:ext cx="9109166" cy="5101132"/>
           </a:xfrm>
           <a:prstGeom prst="rect">
             <a:avLst/>
           </a:prstGeom>
         </p:spPr>
       </p:pic>
-      <p:sp>
-        <p:nvSpPr>
-          <p:cNvPr id="8" name="Rectangle 7"/>
-          <p:cNvSpPr/>
-          <p:nvPr/>
-        </p:nvSpPr>
-        <p:spPr>
-          <a:xfrm>
-            <a:off x="6172200" y="1737360"/>
-            <a:ext cx="5577840" cy="3123590"/>
-          </a:xfrm>
-          <a:prstGeom prst="rect">
-            <a:avLst/>
-          </a:prstGeom>
-          <a:noFill/>
-          <a:ln w="9525">
-            <a:solidFill>
-              <a:srgbClr val="DDD8C6"/>
-            </a:solidFill>
-          </a:ln>
-          <a:effectLst/>
-        </p:spPr>
-        <p:style>
-          <a:lnRef idx="1">
-            <a:schemeClr val="accent1"/>
-          </a:lnRef>
-          <a:fillRef idx="3">
-            <a:schemeClr val="accent1"/>
-          </a:fillRef>
-          <a:effectRef idx="2">
-            <a:schemeClr val="accent1"/>
-          </a:effectRef>
-          <a:fontRef idx="minor">
-            <a:schemeClr val="lt1"/>
-          </a:fontRef>
-        </p:style>
-        <p:txBody>
-          <a:bodyPr rtlCol="0" anchor="ctr"/>
-          <a:lstStyle/>
-          <a:p>
-            <a:pPr algn="ctr"/>
-            <a:endParaRPr/>
-          </a:p>
-        </p:txBody>
-      </p:sp>
     </p:spTree>
-  </p:cSld>
-  <p:clrMapOvr>
-    <a:masterClrMapping/>
-  </p:clrMapOvr>
-</p:sld>
-</file>
-
-<file path=ppt/slides/slide13.xml><?xml version="1.0" encoding="utf-8"?>
-<p:sld xmlns:a="http://schemas.openxmlformats.org/drawingml/2006/main" xmlns:r="http://schemas.openxmlformats.org/officeDocument/2006/relationships" xmlns:p="http://schemas.openxmlformats.org/presentationml/2006/main">
-  <p:cSld>
-    <p:spTree>
-      <p:nvGrpSpPr>
-        <p:cNvPr id="1" name=""/>
-        <p:cNvGrpSpPr/>
-        <p:nvPr/>
-      </p:nvGrpSpPr>
-      <p:grpSpPr>
-        <a:xfrm>
-          <a:off x="0" y="0"/>
-          <a:ext cx="0" cy="0"/>
-          <a:chOff x="0" y="0"/>
-          <a:chExt cx="0" cy="0"/>
-        </a:xfrm>
-      </p:grpSpPr>
-      <p:sp>
-        <p:nvSpPr>
-          <p:cNvPr id="2" name="Rectangle 1"/>
-          <p:cNvSpPr/>
-          <p:nvPr/>
-        </p:nvSpPr>
-        <p:spPr>
-          <a:xfrm>
-            <a:off x="0" y="0"/>
-            <a:ext cx="12191695" cy="6858000"/>
-          </a:xfrm>
-          <a:prstGeom prst="rect">
-            <a:avLst/>
-          </a:prstGeom>
-          <a:solidFill>
-            <a:srgbClr val="F6F4EE"/>
-          </a:solidFill>
-          <a:ln>
-            <a:noFill/>
-          </a:ln>
-          <a:effectLst/>
-        </p:spPr>
-        <p:style>
-          <a:lnRef idx="1">
-            <a:schemeClr val="accent1"/>
-          </a:lnRef>
-          <a:fillRef idx="3">
-            <a:schemeClr val="accent1"/>
-          </a:fillRef>
-          <a:effectRef idx="2">
-            <a:schemeClr val="accent1"/>
-          </a:effectRef>
-          <a:fontRef idx="minor">
-            <a:schemeClr val="lt1"/>
-          </a:fontRef>
-        </p:style>
-        <p:txBody>
-          <a:bodyPr rtlCol="0" anchor="ctr"/>
-          <a:lstStyle/>
-          <a:p>
-            <a:pPr algn="ctr"/>
-            <a:endParaRPr/>
-          </a:p>
-        </p:txBody>
-      </p:sp>
-      <p:sp>
-        <p:nvSpPr>
-          <p:cNvPr id="3" name="TextBox 2"/>
-          <p:cNvSpPr txBox="1"/>
-          <p:nvPr/>
-        </p:nvSpPr>
-        <p:spPr>
-          <a:xfrm>
-            <a:off x="640080" y="457200"/>
-            <a:ext cx="10881360" cy="365760"/>
-          </a:xfrm>
-          <a:prstGeom prst="rect">
-            <a:avLst/>
-          </a:prstGeom>
-          <a:noFill/>
-        </p:spPr>
-        <p:txBody>
-          <a:bodyPr wrap="square">
-            <a:spAutoFit/>
-          </a:bodyPr>
-          <a:lstStyle/>
-          <a:p>
-            <a:pPr algn="l">
-              <a:lnSpc>
-                <a:spcPct val="115000"/>
-              </a:lnSpc>
-            </a:pPr>
-            <a:r>
-              <a:rPr sz="1300" b="1" i="0">
-                <a:solidFill>
-                  <a:srgbClr val="C85526"/>
-                </a:solidFill>
-                <a:latin typeface="Calibri"/>
-              </a:rPr>
-              <a:t>JUSTIFICACIÓN TÉCNICA</a:t>
-            </a:r>
-          </a:p>
-        </p:txBody>
-      </p:sp>
-      <p:sp>
-        <p:nvSpPr>
-          <p:cNvPr id="4" name="TextBox 3"/>
-          <p:cNvSpPr txBox="1"/>
-          <p:nvPr/>
-        </p:nvSpPr>
-        <p:spPr>
-          <a:xfrm>
-            <a:off x="640080" y="777240"/>
-            <a:ext cx="10881360" cy="1005840"/>
-          </a:xfrm>
-          <a:prstGeom prst="rect">
-            <a:avLst/>
-          </a:prstGeom>
-          <a:noFill/>
-        </p:spPr>
-        <p:txBody>
-          <a:bodyPr wrap="square">
-            <a:spAutoFit/>
-          </a:bodyPr>
-          <a:lstStyle/>
-          <a:p>
-            <a:pPr algn="l">
-              <a:lnSpc>
-                <a:spcPct val="115000"/>
-              </a:lnSpc>
-            </a:pPr>
-            <a:r>
-              <a:rPr sz="3000" b="1" i="0">
-                <a:solidFill>
-                  <a:srgbClr val="15150F"/>
-                </a:solidFill>
-                <a:latin typeface="Calibri"/>
-              </a:rPr>
-              <a:t>Por qué estos tipos de gráfico</a:t>
-            </a:r>
-          </a:p>
-        </p:txBody>
-      </p:sp>
-      <p:sp>
-        <p:nvSpPr>
-          <p:cNvPr id="5" name="TextBox 4"/>
-          <p:cNvSpPr txBox="1"/>
-          <p:nvPr/>
-        </p:nvSpPr>
-        <p:spPr>
-          <a:xfrm>
-            <a:off x="640080" y="1874519"/>
-            <a:ext cx="228600" cy="365760"/>
-          </a:xfrm>
-          <a:prstGeom prst="rect">
-            <a:avLst/>
-          </a:prstGeom>
-          <a:noFill/>
-        </p:spPr>
-        <p:txBody>
-          <a:bodyPr wrap="square">
-            <a:spAutoFit/>
-          </a:bodyPr>
-          <a:lstStyle/>
-          <a:p>
-            <a:pPr algn="l">
-              <a:lnSpc>
-                <a:spcPct val="115000"/>
-              </a:lnSpc>
-            </a:pPr>
-            <a:r>
-              <a:rPr sz="1400" b="1" i="0">
-                <a:solidFill>
-                  <a:srgbClr val="C85526"/>
-                </a:solidFill>
-                <a:latin typeface="Calibri"/>
-              </a:rPr>
-              <a:t>•</a:t>
-            </a:r>
-          </a:p>
-        </p:txBody>
-      </p:sp>
-      <p:sp>
-        <p:nvSpPr>
-          <p:cNvPr id="6" name="TextBox 5"/>
-          <p:cNvSpPr txBox="1"/>
-          <p:nvPr/>
-        </p:nvSpPr>
-        <p:spPr>
-          <a:xfrm>
-            <a:off x="914400" y="1874519"/>
-            <a:ext cx="10607040" cy="777240"/>
-          </a:xfrm>
-          <a:prstGeom prst="rect">
-            <a:avLst/>
-          </a:prstGeom>
-          <a:noFill/>
-        </p:spPr>
-        <p:txBody>
-          <a:bodyPr wrap="square">
-            <a:spAutoFit/>
-          </a:bodyPr>
-          <a:lstStyle/>
-          <a:p>
-            <a:pPr algn="l">
-              <a:lnSpc>
-                <a:spcPct val="115000"/>
-              </a:lnSpc>
-            </a:pPr>
-            <a:r>
-              <a:rPr sz="1350" b="0" i="0">
-                <a:solidFill>
-                  <a:srgbClr val="5B594C"/>
-                </a:solidFill>
-                <a:latin typeface="Calibri"/>
-              </a:rPr>
-              <a:t>Barras horizontales para rankings de categorías, la posición en un eje común es lo que el ojo compara con más precisión, y permite etiquetas de texto largas sin rotarlas.</a:t>
-            </a:r>
-          </a:p>
-        </p:txBody>
-      </p:sp>
-      <p:sp>
-        <p:nvSpPr>
-          <p:cNvPr id="7" name="TextBox 6"/>
-          <p:cNvSpPr txBox="1"/>
-          <p:nvPr/>
-        </p:nvSpPr>
-        <p:spPr>
-          <a:xfrm>
-            <a:off x="640080" y="2715767"/>
-            <a:ext cx="228600" cy="365760"/>
-          </a:xfrm>
-          <a:prstGeom prst="rect">
-            <a:avLst/>
-          </a:prstGeom>
-          <a:noFill/>
-        </p:spPr>
-        <p:txBody>
-          <a:bodyPr wrap="square">
-            <a:spAutoFit/>
-          </a:bodyPr>
-          <a:lstStyle/>
-          <a:p>
-            <a:pPr algn="l">
-              <a:lnSpc>
-                <a:spcPct val="115000"/>
-              </a:lnSpc>
-            </a:pPr>
-            <a:r>
-              <a:rPr sz="1400" b="1" i="0">
-                <a:solidFill>
-                  <a:srgbClr val="C85526"/>
-                </a:solidFill>
-                <a:latin typeface="Calibri"/>
-              </a:rPr>
-              <a:t>•</a:t>
-            </a:r>
-          </a:p>
-        </p:txBody>
-      </p:sp>
-      <p:sp>
-        <p:nvSpPr>
-          <p:cNvPr id="8" name="TextBox 7"/>
-          <p:cNvSpPr txBox="1"/>
-          <p:nvPr/>
-        </p:nvSpPr>
-        <p:spPr>
-          <a:xfrm>
-            <a:off x="914400" y="2715767"/>
-            <a:ext cx="10607040" cy="777240"/>
-          </a:xfrm>
-          <a:prstGeom prst="rect">
-            <a:avLst/>
-          </a:prstGeom>
-          <a:noFill/>
-        </p:spPr>
-        <p:txBody>
-          <a:bodyPr wrap="square">
-            <a:spAutoFit/>
-          </a:bodyPr>
-          <a:lstStyle/>
-          <a:p>
-            <a:pPr algn="l">
-              <a:lnSpc>
-                <a:spcPct val="115000"/>
-              </a:lnSpc>
-            </a:pPr>
-            <a:r>
-              <a:rPr sz="1350" b="0" i="0">
-                <a:solidFill>
-                  <a:srgbClr val="5B594C"/>
-                </a:solidFill>
-                <a:latin typeface="Calibri"/>
-              </a:rPr>
-              <a:t>Dispersión para la relación popularidad-calificación, el único tipo de gráfico que muestra si dos variables continuas están o no relacionadas, sin presuponer una tendencia.</a:t>
-            </a:r>
-          </a:p>
-        </p:txBody>
-      </p:sp>
-      <p:sp>
-        <p:nvSpPr>
-          <p:cNvPr id="9" name="TextBox 8"/>
-          <p:cNvSpPr txBox="1"/>
-          <p:nvPr/>
-        </p:nvSpPr>
-        <p:spPr>
-          <a:xfrm>
-            <a:off x="640080" y="3557015"/>
-            <a:ext cx="228600" cy="365760"/>
-          </a:xfrm>
-          <a:prstGeom prst="rect">
-            <a:avLst/>
-          </a:prstGeom>
-          <a:noFill/>
-        </p:spPr>
-        <p:txBody>
-          <a:bodyPr wrap="square">
-            <a:spAutoFit/>
-          </a:bodyPr>
-          <a:lstStyle/>
-          <a:p>
-            <a:pPr algn="l">
-              <a:lnSpc>
-                <a:spcPct val="115000"/>
-              </a:lnSpc>
-            </a:pPr>
-            <a:r>
-              <a:rPr sz="1400" b="1" i="0">
-                <a:solidFill>
-                  <a:srgbClr val="C85526"/>
-                </a:solidFill>
-                <a:latin typeface="Calibri"/>
-              </a:rPr>
-              <a:t>•</a:t>
-            </a:r>
-          </a:p>
-        </p:txBody>
-      </p:sp>
-      <p:sp>
-        <p:nvSpPr>
-          <p:cNvPr id="10" name="TextBox 9"/>
-          <p:cNvSpPr txBox="1"/>
-          <p:nvPr/>
-        </p:nvSpPr>
-        <p:spPr>
-          <a:xfrm>
-            <a:off x="914400" y="3557015"/>
-            <a:ext cx="10607040" cy="777240"/>
-          </a:xfrm>
-          <a:prstGeom prst="rect">
-            <a:avLst/>
-          </a:prstGeom>
-          <a:noFill/>
-        </p:spPr>
-        <p:txBody>
-          <a:bodyPr wrap="square">
-            <a:spAutoFit/>
-          </a:bodyPr>
-          <a:lstStyle/>
-          <a:p>
-            <a:pPr algn="l">
-              <a:lnSpc>
-                <a:spcPct val="115000"/>
-              </a:lnSpc>
-            </a:pPr>
-            <a:r>
-              <a:rPr sz="1350" b="0" i="0">
-                <a:solidFill>
-                  <a:srgbClr val="5B594C"/>
-                </a:solidFill>
-                <a:latin typeface="Calibri"/>
-              </a:rPr>
-              <a:t>Líneas para tendencias en el tiempo, preservan el orden temporal y hacen evidente la forma de la serie, incluida la caída artificial de 2025.</a:t>
-            </a:r>
-          </a:p>
-        </p:txBody>
-      </p:sp>
-      <p:sp>
-        <p:nvSpPr>
-          <p:cNvPr id="11" name="TextBox 10"/>
-          <p:cNvSpPr txBox="1"/>
-          <p:nvPr/>
-        </p:nvSpPr>
-        <p:spPr>
-          <a:xfrm>
-            <a:off x="640080" y="4398263"/>
-            <a:ext cx="228600" cy="365760"/>
-          </a:xfrm>
-          <a:prstGeom prst="rect">
-            <a:avLst/>
-          </a:prstGeom>
-          <a:noFill/>
-        </p:spPr>
-        <p:txBody>
-          <a:bodyPr wrap="square">
-            <a:spAutoFit/>
-          </a:bodyPr>
-          <a:lstStyle/>
-          <a:p>
-            <a:pPr algn="l">
-              <a:lnSpc>
-                <a:spcPct val="115000"/>
-              </a:lnSpc>
-            </a:pPr>
-            <a:r>
-              <a:rPr sz="1400" b="1" i="0">
-                <a:solidFill>
-                  <a:srgbClr val="C85526"/>
-                </a:solidFill>
-                <a:latin typeface="Calibri"/>
-              </a:rPr>
-              <a:t>•</a:t>
-            </a:r>
-          </a:p>
-        </p:txBody>
-      </p:sp>
-      <p:sp>
-        <p:nvSpPr>
-          <p:cNvPr id="12" name="TextBox 11"/>
-          <p:cNvSpPr txBox="1"/>
-          <p:nvPr/>
-        </p:nvSpPr>
-        <p:spPr>
-          <a:xfrm>
-            <a:off x="914400" y="4398263"/>
-            <a:ext cx="10607040" cy="777240"/>
-          </a:xfrm>
-          <a:prstGeom prst="rect">
-            <a:avLst/>
-          </a:prstGeom>
-          <a:noFill/>
-        </p:spPr>
-        <p:txBody>
-          <a:bodyPr wrap="square">
-            <a:spAutoFit/>
-          </a:bodyPr>
-          <a:lstStyle/>
-          <a:p>
-            <a:pPr algn="l">
-              <a:lnSpc>
-                <a:spcPct val="115000"/>
-              </a:lnSpc>
-            </a:pPr>
-            <a:r>
-              <a:rPr sz="1350" b="0" i="0">
-                <a:solidFill>
-                  <a:srgbClr val="5B594C"/>
-                </a:solidFill>
-                <a:latin typeface="Calibri"/>
-              </a:rPr>
-              <a:t>Mediana, no promedio, en los rankings de popularidad por país e idioma, esa variable tiene outliers extremos conocidos y un puñado de títulos virales puede definir un promedio sin representar a la categoría.</a:t>
-            </a:r>
-          </a:p>
-        </p:txBody>
-      </p:sp>
-      <p:sp>
-        <p:nvSpPr>
-          <p:cNvPr id="13" name="TextBox 12"/>
-          <p:cNvSpPr txBox="1"/>
-          <p:nvPr/>
-        </p:nvSpPr>
-        <p:spPr>
-          <a:xfrm>
-            <a:off x="640080" y="5239511"/>
-            <a:ext cx="228600" cy="365760"/>
-          </a:xfrm>
-          <a:prstGeom prst="rect">
-            <a:avLst/>
-          </a:prstGeom>
-          <a:noFill/>
-        </p:spPr>
-        <p:txBody>
-          <a:bodyPr wrap="square">
-            <a:spAutoFit/>
-          </a:bodyPr>
-          <a:lstStyle/>
-          <a:p>
-            <a:pPr algn="l">
-              <a:lnSpc>
-                <a:spcPct val="115000"/>
-              </a:lnSpc>
-            </a:pPr>
-            <a:r>
-              <a:rPr sz="1400" b="1" i="0">
-                <a:solidFill>
-                  <a:srgbClr val="C85526"/>
-                </a:solidFill>
-                <a:latin typeface="Calibri"/>
-              </a:rPr>
-              <a:t>•</a:t>
-            </a:r>
-          </a:p>
-        </p:txBody>
-      </p:sp>
-      <p:sp>
-        <p:nvSpPr>
-          <p:cNvPr id="14" name="TextBox 13"/>
-          <p:cNvSpPr txBox="1"/>
-          <p:nvPr/>
-        </p:nvSpPr>
-        <p:spPr>
-          <a:xfrm>
-            <a:off x="914400" y="5239511"/>
-            <a:ext cx="10607040" cy="777240"/>
-          </a:xfrm>
-          <a:prstGeom prst="rect">
-            <a:avLst/>
-          </a:prstGeom>
-          <a:noFill/>
-        </p:spPr>
-        <p:txBody>
-          <a:bodyPr wrap="square">
-            <a:spAutoFit/>
-          </a:bodyPr>
-          <a:lstStyle/>
-          <a:p>
-            <a:pPr algn="l">
-              <a:lnSpc>
-                <a:spcPct val="115000"/>
-              </a:lnSpc>
-            </a:pPr>
-            <a:r>
-              <a:rPr sz="1350" b="0" i="0">
-                <a:solidFill>
-                  <a:srgbClr val="5B594C"/>
-                </a:solidFill>
-                <a:latin typeface="Calibri"/>
-              </a:rPr>
-              <a:t>Un color por rol (azul película, naranjo serie) solo donde el gráfico compara ambos formatos; gris neutro en rankings combinados, para no sugerir un tipo que no corresponde.</a:t>
-            </a:r>
-          </a:p>
-        </p:txBody>
-      </p:sp>
-    </p:spTree>
+    <p:extLst>
+      <p:ext uri="{BB962C8B-B14F-4D97-AF65-F5344CB8AC3E}">
+        <p14:creationId xmlns:p14="http://schemas.microsoft.com/office/powerpoint/2010/main" val="2172275421"/>
+      </p:ext>
+    </p:extLst>
   </p:cSld>
   <p:clrMapOvr>
     <a:masterClrMapping/>
@@ -6076,13 +5576,13 @@
               </a:lnSpc>
             </a:pPr>
             <a:r>
-              <a:rPr sz="1300" b="1" i="0">
+              <a:rPr sz="1300" b="1">
                 <a:solidFill>
                   <a:srgbClr val="C85526"/>
                 </a:solidFill>
                 <a:latin typeface="Calibri"/>
               </a:rPr>
-              <a:t>RECOMENDACIÓN EJECUTIVA · DIRECTORIO Y GERENCIA GENERAL</a:t>
+              <a:t>RECOMENDACIÓN</a:t>
             </a:r>
           </a:p>
         </p:txBody>
@@ -6115,7 +5615,7 @@
               </a:lnSpc>
             </a:pPr>
             <a:r>
-              <a:rPr sz="3000" b="1" i="0">
+              <a:rPr sz="3000" b="1">
                 <a:solidFill>
                   <a:srgbClr val="15150F"/>
                 </a:solidFill>
@@ -6163,12 +5663,12 @@
           </a:fontRef>
         </p:style>
         <p:txBody>
-          <a:bodyPr wrap="square" rtlCol="0" anchor="ctr"/>
+          <a:bodyPr rtlCol="0" anchor="ctr"/>
           <a:lstStyle/>
           <a:p>
             <a:pPr algn="ctr"/>
             <a:r>
-              <a:rPr sz="1600" b="1">
+              <a:rPr sz="1800" b="1">
                 <a:solidFill>
                   <a:srgbClr val="FFFFFF"/>
                 </a:solidFill>
@@ -6187,7 +5687,7 @@
         <p:spPr>
           <a:xfrm>
             <a:off x="1325880" y="2084832"/>
-            <a:ext cx="10058400" cy="822960"/>
+            <a:ext cx="10058400" cy="359522"/>
           </a:xfrm>
           <a:prstGeom prst="rect">
             <a:avLst/>
@@ -6202,18 +5702,24 @@
           <a:p>
             <a:pPr algn="l">
               <a:lnSpc>
-                <a:spcPct val="115000"/>
+                <a:spcPct val="125000"/>
               </a:lnSpc>
             </a:pPr>
             <a:r>
-              <a:rPr sz="1500" b="0" i="0">
-                <a:solidFill>
-                  <a:srgbClr val="5B594C"/>
+              <a:rPr lang="en-CL" sz="1500" dirty="0">
+                <a:solidFill>
+                  <a:srgbClr val="15150F"/>
                 </a:solidFill>
                 <a:latin typeface="Calibri"/>
               </a:rPr>
-              <a:t>No usar vote_average como proxy de éxito, mide algo distinto a lo que la audiencia realmente consume.</a:t>
-            </a:r>
+              <a:t>No usar los votos promedio como indicador de éxito.</a:t>
+            </a:r>
+            <a:endParaRPr sz="1500" b="0" dirty="0">
+              <a:solidFill>
+                <a:srgbClr val="15150F"/>
+              </a:solidFill>
+              <a:latin typeface="Calibri"/>
+            </a:endParaRPr>
           </a:p>
         </p:txBody>
       </p:sp>
@@ -6254,12 +5760,12 @@
           </a:fontRef>
         </p:style>
         <p:txBody>
-          <a:bodyPr wrap="square" rtlCol="0" anchor="ctr"/>
+          <a:bodyPr rtlCol="0" anchor="ctr"/>
           <a:lstStyle/>
           <a:p>
             <a:pPr algn="ctr"/>
             <a:r>
-              <a:rPr sz="1600" b="1">
+              <a:rPr sz="1800" b="1">
                 <a:solidFill>
                   <a:srgbClr val="FFFFFF"/>
                 </a:solidFill>
@@ -6293,13 +5799,13 @@
           <a:p>
             <a:pPr algn="l">
               <a:lnSpc>
-                <a:spcPct val="115000"/>
+                <a:spcPct val="125000"/>
               </a:lnSpc>
             </a:pPr>
             <a:r>
-              <a:rPr sz="1500" b="0" i="0">
-                <a:solidFill>
-                  <a:srgbClr val="5B594C"/>
+              <a:rPr sz="1500" b="0">
+                <a:solidFill>
+                  <a:srgbClr val="15150F"/>
                 </a:solidFill>
                 <a:latin typeface="Calibri"/>
               </a:rPr>
@@ -6345,12 +5851,12 @@
           </a:fontRef>
         </p:style>
         <p:txBody>
-          <a:bodyPr wrap="square" rtlCol="0" anchor="ctr"/>
+          <a:bodyPr rtlCol="0" anchor="ctr"/>
           <a:lstStyle/>
           <a:p>
             <a:pPr algn="ctr"/>
             <a:r>
-              <a:rPr sz="1600" b="1">
+              <a:rPr sz="1800" b="1">
                 <a:solidFill>
                   <a:srgbClr val="FFFFFF"/>
                 </a:solidFill>
@@ -6384,13 +5890,13 @@
           <a:p>
             <a:pPr algn="l">
               <a:lnSpc>
-                <a:spcPct val="115000"/>
+                <a:spcPct val="125000"/>
               </a:lnSpc>
             </a:pPr>
             <a:r>
-              <a:rPr sz="1500" b="0" i="0">
-                <a:solidFill>
-                  <a:srgbClr val="5B594C"/>
+              <a:rPr sz="1500" b="0">
+                <a:solidFill>
+                  <a:srgbClr val="15150F"/>
                 </a:solidFill>
                 <a:latin typeface="Calibri"/>
               </a:rPr>
@@ -6432,7 +5938,7 @@
         </p:nvSpPr>
         <p:spPr>
           <a:xfrm>
-            <a:off x="152400" y="0"/>
+            <a:off x="0" y="0"/>
             <a:ext cx="12191695" cy="6858000"/>
           </a:xfrm>
           <a:prstGeom prst="rect">
@@ -6497,7 +6003,7 @@
               </a:lnSpc>
             </a:pPr>
             <a:r>
-              <a:rPr sz="1300" b="1" i="0">
+              <a:rPr sz="1300" b="1">
                 <a:solidFill>
                   <a:srgbClr val="C85526"/>
                 </a:solidFill>
@@ -6532,11 +6038,11 @@
           <a:p>
             <a:pPr algn="l">
               <a:lnSpc>
-                <a:spcPct val="115000"/>
+                <a:spcPct val="110000"/>
               </a:lnSpc>
             </a:pPr>
             <a:r>
-              <a:rPr sz="3600" b="1" i="0">
+              <a:rPr sz="3400" b="1">
                 <a:solidFill>
                   <a:srgbClr val="15150F"/>
                 </a:solidFill>
@@ -6571,21 +6077,51 @@
           <a:p>
             <a:pPr algn="l">
               <a:lnSpc>
-                <a:spcPct val="115000"/>
+                <a:spcPct val="130000"/>
               </a:lnSpc>
             </a:pPr>
             <a:r>
-              <a:rPr sz="1700" b="0" i="0">
+              <a:rPr sz="1600" b="0">
                 <a:solidFill>
                   <a:srgbClr val="5B594C"/>
                 </a:solidFill>
                 <a:latin typeface="Calibri"/>
               </a:rPr>
-              <a:t>No es la calidad. Es otra cosa, y se puede medir por separado. Gracias.</a:t>
-            </a:r>
-          </a:p>
-        </p:txBody>
-      </p:sp>
+              <a:t>No es la calificación, es otra señal, y hay que medirlas y decidir sobre ellas por separado. Gracias.</a:t>
+            </a:r>
+          </a:p>
+        </p:txBody>
+      </p:sp>
+      <p:pic>
+        <p:nvPicPr>
+          <p:cNvPr id="6" name="Picture 5" descr="duoc_logo.png">
+            <a:extLst>
+              <a:ext uri="{FF2B5EF4-FFF2-40B4-BE49-F238E27FC236}">
+                <a16:creationId xmlns:a16="http://schemas.microsoft.com/office/drawing/2014/main" id="{BB2F9E06-F60F-055E-66E7-3509D18C8174}"/>
+              </a:ext>
+            </a:extLst>
+          </p:cNvPr>
+          <p:cNvPicPr>
+            <a:picLocks noChangeAspect="1"/>
+          </p:cNvPicPr>
+          <p:nvPr/>
+        </p:nvPicPr>
+        <p:blipFill>
+          <a:blip r:embed="rId3"/>
+          <a:stretch>
+            <a:fillRect/>
+          </a:stretch>
+        </p:blipFill>
+        <p:spPr>
+          <a:xfrm>
+            <a:off x="640080" y="512064"/>
+            <a:ext cx="2377440" cy="584454"/>
+          </a:xfrm>
+          <a:prstGeom prst="rect">
+            <a:avLst/>
+          </a:prstGeom>
+        </p:spPr>
+      </p:pic>
     </p:spTree>
   </p:cSld>
   <p:clrMapOvr>
@@ -6619,7 +6155,7 @@
         </p:nvSpPr>
         <p:spPr>
           <a:xfrm>
-            <a:off x="0" y="0"/>
+            <a:off x="-15088" y="0"/>
             <a:ext cx="12191695" cy="6858000"/>
           </a:xfrm>
           <a:prstGeom prst="rect">
@@ -6684,13 +6220,13 @@
               </a:lnSpc>
             </a:pPr>
             <a:r>
-              <a:rPr sz="1300" b="1" i="0">
+              <a:rPr sz="1300" b="1">
                 <a:solidFill>
                   <a:srgbClr val="C85526"/>
                 </a:solidFill>
                 <a:latin typeface="Calibri"/>
               </a:rPr>
-              <a:t>AUDIENCIA Y ESTRATEGIA DE COMUNICACIÓN</a:t>
+              <a:t>EL CATÁLOGO</a:t>
             </a:r>
           </a:p>
         </p:txBody>
@@ -6723,27 +6259,27 @@
               </a:lnSpc>
             </a:pPr>
             <a:r>
-              <a:rPr sz="3000" b="1" i="0">
+              <a:rPr sz="3000" b="1">
                 <a:solidFill>
                   <a:srgbClr val="15150F"/>
                 </a:solidFill>
                 <a:latin typeface="Calibri"/>
               </a:rPr>
-              <a:t>¿Para quién es esta charla?</a:t>
-            </a:r>
-          </a:p>
-        </p:txBody>
-      </p:sp>
-      <p:sp>
-        <p:nvSpPr>
-          <p:cNvPr id="5" name="Rectangle 4"/>
+              <a:t>Antes de responder, un vistazo a los datos</a:t>
+            </a:r>
+          </a:p>
+        </p:txBody>
+      </p:sp>
+      <p:sp>
+        <p:nvSpPr>
+          <p:cNvPr id="7" name="Rectangle 6"/>
           <p:cNvSpPr/>
           <p:nvPr/>
         </p:nvSpPr>
         <p:spPr>
           <a:xfrm>
-            <a:off x="640080" y="1874519"/>
-            <a:ext cx="3474720" cy="1417320"/>
+            <a:off x="7941537" y="5009118"/>
+            <a:ext cx="1691640" cy="1463040"/>
           </a:xfrm>
           <a:prstGeom prst="rect">
             <a:avLst/>
@@ -6751,9 +6287,9 @@
           <a:solidFill>
             <a:srgbClr val="FFFFFF"/>
           </a:solidFill>
-          <a:ln w="25400">
+          <a:ln w="9525">
             <a:solidFill>
-              <a:srgbClr val="C85526"/>
+              <a:srgbClr val="DDD8C6"/>
             </a:solidFill>
           </a:ln>
           <a:effectLst/>
@@ -6773,47 +6309,42 @@
           </a:fontRef>
         </p:style>
         <p:txBody>
-          <a:bodyPr wrap="square" lIns="164592" tIns="109728" rIns="137160" rtlCol="0" anchor="ctr"/>
+          <a:bodyPr wrap="square" lIns="137160" rtlCol="0" anchor="ctr"/>
           <a:lstStyle/>
           <a:p>
             <a:pPr algn="ctr"/>
             <a:r>
-              <a:rPr sz="1400" b="1">
-                <a:solidFill>
-                  <a:srgbClr val="15150F"/>
+              <a:rPr sz="2400" b="1" dirty="0">
+                <a:solidFill>
+                  <a:srgbClr val="2A78D6"/>
                 </a:solidFill>
               </a:rPr>
-              <a:t>Directorio</a:t>
-            </a:r>
-          </a:p>
-          <a:p>
-            <a:pPr>
-              <a:lnSpc>
-                <a:spcPct val="110000"/>
-              </a:lnSpc>
-            </a:pPr>
-            <a:r>
-              <a:rPr sz="1050">
-                <a:solidFill>
-                  <a:srgbClr val="5B594C"/>
+              <a:t>42,6</a:t>
+            </a:r>
+          </a:p>
+          <a:p>
+            <a:pPr algn="ctr"/>
+            <a:r>
+              <a:rPr sz="1000" dirty="0">
+                <a:solidFill>
+                  <a:srgbClr val="918F7F"/>
                 </a:solidFill>
               </a:rPr>
-              <a:t>Indicadores consolidados, tendencias, comparaciones,
-recomendaciones ejecutivas.</a:t>
-            </a:r>
-          </a:p>
-        </p:txBody>
-      </p:sp>
-      <p:sp>
-        <p:nvSpPr>
-          <p:cNvPr id="6" name="Rectangle 5"/>
+              <a:t>POPULARIDAD PROM.</a:t>
+            </a:r>
+          </a:p>
+        </p:txBody>
+      </p:sp>
+      <p:sp>
+        <p:nvSpPr>
+          <p:cNvPr id="8" name="Rectangle 7"/>
           <p:cNvSpPr/>
           <p:nvPr/>
         </p:nvSpPr>
         <p:spPr>
           <a:xfrm>
-            <a:off x="4343400" y="1874519"/>
-            <a:ext cx="3474720" cy="1417320"/>
+            <a:off x="2013177" y="5013498"/>
+            <a:ext cx="1691640" cy="1463040"/>
           </a:xfrm>
           <a:prstGeom prst="rect">
             <a:avLst/>
@@ -6821,9 +6352,9 @@
           <a:solidFill>
             <a:srgbClr val="FFFFFF"/>
           </a:solidFill>
-          <a:ln w="25400">
+          <a:ln w="9525">
             <a:solidFill>
-              <a:srgbClr val="C85526"/>
+              <a:srgbClr val="DDD8C6"/>
             </a:solidFill>
           </a:ln>
           <a:effectLst/>
@@ -6843,47 +6374,42 @@
           </a:fontRef>
         </p:style>
         <p:txBody>
-          <a:bodyPr wrap="square" lIns="164592" tIns="109728" rIns="137160" rtlCol="0" anchor="ctr"/>
+          <a:bodyPr wrap="square" lIns="137160" rtlCol="0" anchor="ctr"/>
           <a:lstStyle/>
           <a:p>
             <a:pPr algn="ctr"/>
             <a:r>
-              <a:rPr sz="1400" b="1">
-                <a:solidFill>
-                  <a:srgbClr val="15150F"/>
+              <a:rPr sz="2400" b="1" dirty="0">
+                <a:solidFill>
+                  <a:srgbClr val="2A78D6"/>
                 </a:solidFill>
               </a:rPr>
-              <a:t>Gerencia General</a:t>
-            </a:r>
-          </a:p>
-          <a:p>
-            <a:pPr>
-              <a:lnSpc>
-                <a:spcPct val="110000"/>
-              </a:lnSpc>
-            </a:pPr>
-            <a:r>
-              <a:rPr sz="1050">
-                <a:solidFill>
-                  <a:srgbClr val="5B594C"/>
+              <a:t>5,7</a:t>
+            </a:r>
+          </a:p>
+          <a:p>
+            <a:pPr algn="ctr"/>
+            <a:r>
+              <a:rPr sz="1000" dirty="0">
+                <a:solidFill>
+                  <a:srgbClr val="918F7F"/>
                 </a:solidFill>
               </a:rPr>
-              <a:t>Visión global del catálogo para la planificación
-estratégica.</a:t>
-            </a:r>
-          </a:p>
-        </p:txBody>
-      </p:sp>
-      <p:sp>
-        <p:nvSpPr>
-          <p:cNvPr id="7" name="Rectangle 6"/>
+              <a:t>CALIFICACIÓN PROM.</a:t>
+            </a:r>
+          </a:p>
+        </p:txBody>
+      </p:sp>
+      <p:sp>
+        <p:nvSpPr>
+          <p:cNvPr id="9" name="Rectangle 8"/>
           <p:cNvSpPr/>
           <p:nvPr/>
         </p:nvSpPr>
         <p:spPr>
           <a:xfrm>
-            <a:off x="8046720" y="1874519"/>
-            <a:ext cx="3474720" cy="1417320"/>
+            <a:off x="3991612" y="5013498"/>
+            <a:ext cx="1691640" cy="1463040"/>
           </a:xfrm>
           <a:prstGeom prst="rect">
             <a:avLst/>
@@ -6913,47 +6439,42 @@
           </a:fontRef>
         </p:style>
         <p:txBody>
-          <a:bodyPr wrap="square" lIns="164592" tIns="109728" rIns="137160" rtlCol="0" anchor="ctr"/>
+          <a:bodyPr wrap="square" lIns="137160" rtlCol="0" anchor="ctr"/>
           <a:lstStyle/>
           <a:p>
             <a:pPr algn="ctr"/>
             <a:r>
-              <a:rPr sz="1400" b="1">
-                <a:solidFill>
-                  <a:srgbClr val="15150F"/>
+              <a:rPr sz="2400" b="1">
+                <a:solidFill>
+                  <a:srgbClr val="2A78D6"/>
                 </a:solidFill>
               </a:rPr>
-              <a:t>Contenidos y Adquisición</a:t>
-            </a:r>
-          </a:p>
-          <a:p>
-            <a:pPr>
-              <a:lnSpc>
-                <a:spcPct val="110000"/>
-              </a:lnSpc>
-            </a:pPr>
-            <a:r>
-              <a:rPr sz="1050">
-                <a:solidFill>
-                  <a:srgbClr val="5B594C"/>
+              <a:t>147 / 82</a:t>
+            </a:r>
+          </a:p>
+          <a:p>
+            <a:pPr algn="ctr"/>
+            <a:r>
+              <a:rPr sz="1000">
+                <a:solidFill>
+                  <a:srgbClr val="918F7F"/>
                 </a:solidFill>
               </a:rPr>
-              <a:t>Géneros, países y títulos con mayor potencial
-estratégico.</a:t>
-            </a:r>
-          </a:p>
-        </p:txBody>
-      </p:sp>
-      <p:sp>
-        <p:nvSpPr>
-          <p:cNvPr id="8" name="Rectangle 7"/>
+              <a:t>PAÍSES / IDIOMAS</a:t>
+            </a:r>
+          </a:p>
+        </p:txBody>
+      </p:sp>
+      <p:sp>
+        <p:nvSpPr>
+          <p:cNvPr id="10" name="Rectangle 9"/>
           <p:cNvSpPr/>
           <p:nvPr/>
         </p:nvSpPr>
         <p:spPr>
           <a:xfrm>
-            <a:off x="640080" y="3520439"/>
-            <a:ext cx="3474720" cy="1417320"/>
+            <a:off x="5970047" y="5020869"/>
+            <a:ext cx="1691640" cy="1463040"/>
           </a:xfrm>
           <a:prstGeom prst="rect">
             <a:avLst/>
@@ -6983,216 +6504,62 @@
           </a:fontRef>
         </p:style>
         <p:txBody>
-          <a:bodyPr wrap="square" lIns="164592" tIns="109728" rIns="137160" rtlCol="0" anchor="ctr"/>
+          <a:bodyPr wrap="square" lIns="137160" rtlCol="0" anchor="ctr"/>
           <a:lstStyle/>
           <a:p>
             <a:pPr algn="ctr"/>
             <a:r>
-              <a:rPr sz="1400" b="1">
-                <a:solidFill>
-                  <a:srgbClr val="15150F"/>
+              <a:rPr sz="2400" b="1">
+                <a:solidFill>
+                  <a:srgbClr val="2A78D6"/>
                 </a:solidFill>
               </a:rPr>
-              <a:t>Marketing</a:t>
-            </a:r>
-          </a:p>
-          <a:p>
-            <a:pPr>
-              <a:lnSpc>
-                <a:spcPct val="110000"/>
-              </a:lnSpc>
-            </a:pPr>
-            <a:r>
-              <a:rPr sz="1050">
-                <a:solidFill>
-                  <a:srgbClr val="5B594C"/>
+              <a:t>24</a:t>
+            </a:r>
+          </a:p>
+          <a:p>
+            <a:pPr algn="ctr"/>
+            <a:r>
+              <a:rPr sz="1000">
+                <a:solidFill>
+                  <a:srgbClr val="918F7F"/>
                 </a:solidFill>
               </a:rPr>
-              <a:t>Contenidos populares, categorías con potencial,
-oportunidades comerciales.</a:t>
-            </a:r>
-          </a:p>
-        </p:txBody>
-      </p:sp>
-      <p:sp>
-        <p:nvSpPr>
-          <p:cNvPr id="9" name="Rectangle 8"/>
-          <p:cNvSpPr/>
+              <a:t>GÉNEROS</a:t>
+            </a:r>
+          </a:p>
+        </p:txBody>
+      </p:sp>
+      <p:pic>
+        <p:nvPicPr>
+          <p:cNvPr id="11" name="Picture 10">
+            <a:extLst>
+              <a:ext uri="{FF2B5EF4-FFF2-40B4-BE49-F238E27FC236}">
+                <a16:creationId xmlns:a16="http://schemas.microsoft.com/office/drawing/2014/main" id="{88997B08-DD44-0CC7-4E23-3281A262C154}"/>
+              </a:ext>
+            </a:extLst>
+          </p:cNvPr>
+          <p:cNvPicPr>
+            <a:picLocks noChangeAspect="1"/>
+          </p:cNvPicPr>
           <p:nvPr/>
-        </p:nvSpPr>
-        <p:spPr>
-          <a:xfrm>
-            <a:off x="4343400" y="3520439"/>
-            <a:ext cx="3474720" cy="1417320"/>
+        </p:nvPicPr>
+        <p:blipFill>
+          <a:blip r:embed="rId3"/>
+          <a:stretch>
+            <a:fillRect/>
+          </a:stretch>
+        </p:blipFill>
+        <p:spPr>
+          <a:xfrm>
+            <a:off x="2013177" y="1610598"/>
+            <a:ext cx="7620000" cy="3048000"/>
           </a:xfrm>
           <a:prstGeom prst="rect">
             <a:avLst/>
           </a:prstGeom>
-          <a:solidFill>
-            <a:srgbClr val="FFFFFF"/>
-          </a:solidFill>
-          <a:ln w="9525">
-            <a:solidFill>
-              <a:srgbClr val="DDD8C6"/>
-            </a:solidFill>
-          </a:ln>
-          <a:effectLst/>
-        </p:spPr>
-        <p:style>
-          <a:lnRef idx="1">
-            <a:schemeClr val="accent1"/>
-          </a:lnRef>
-          <a:fillRef idx="3">
-            <a:schemeClr val="accent1"/>
-          </a:fillRef>
-          <a:effectRef idx="2">
-            <a:schemeClr val="accent1"/>
-          </a:effectRef>
-          <a:fontRef idx="minor">
-            <a:schemeClr val="lt1"/>
-          </a:fontRef>
-        </p:style>
-        <p:txBody>
-          <a:bodyPr wrap="square" lIns="164592" tIns="109728" rIns="137160" rtlCol="0" anchor="ctr"/>
-          <a:lstStyle/>
-          <a:p>
-            <a:pPr algn="ctr"/>
-            <a:r>
-              <a:rPr sz="1400" b="1">
-                <a:solidFill>
-                  <a:srgbClr val="15150F"/>
-                </a:solidFill>
-              </a:rPr>
-              <a:t>Producto</a:t>
-            </a:r>
-          </a:p>
-          <a:p>
-            <a:pPr>
-              <a:lnSpc>
-                <a:spcPct val="110000"/>
-              </a:lnSpc>
-            </a:pPr>
-            <a:r>
-              <a:rPr sz="1050">
-                <a:solidFill>
-                  <a:srgbClr val="5B594C"/>
-                </a:solidFill>
-              </a:rPr>
-              <a:t>Características del catálogo para la experiencia
-de navegación.</a:t>
-            </a:r>
-          </a:p>
-        </p:txBody>
-      </p:sp>
-      <p:sp>
-        <p:nvSpPr>
-          <p:cNvPr id="10" name="Rectangle 9"/>
-          <p:cNvSpPr/>
-          <p:nvPr/>
-        </p:nvSpPr>
-        <p:spPr>
-          <a:xfrm>
-            <a:off x="8046720" y="3520439"/>
-            <a:ext cx="3474720" cy="1417320"/>
-          </a:xfrm>
-          <a:prstGeom prst="rect">
-            <a:avLst/>
-          </a:prstGeom>
-          <a:solidFill>
-            <a:srgbClr val="FFFFFF"/>
-          </a:solidFill>
-          <a:ln w="9525">
-            <a:solidFill>
-              <a:srgbClr val="DDD8C6"/>
-            </a:solidFill>
-          </a:ln>
-          <a:effectLst/>
-        </p:spPr>
-        <p:style>
-          <a:lnRef idx="1">
-            <a:schemeClr val="accent1"/>
-          </a:lnRef>
-          <a:fillRef idx="3">
-            <a:schemeClr val="accent1"/>
-          </a:fillRef>
-          <a:effectRef idx="2">
-            <a:schemeClr val="accent1"/>
-          </a:effectRef>
-          <a:fontRef idx="minor">
-            <a:schemeClr val="lt1"/>
-          </a:fontRef>
-        </p:style>
-        <p:txBody>
-          <a:bodyPr wrap="square" lIns="164592" tIns="109728" rIns="137160" rtlCol="0" anchor="ctr"/>
-          <a:lstStyle/>
-          <a:p>
-            <a:pPr algn="ctr"/>
-            <a:r>
-              <a:rPr sz="1400" b="1">
-                <a:solidFill>
-                  <a:srgbClr val="15150F"/>
-                </a:solidFill>
-              </a:rPr>
-              <a:t>Data &amp; Analytics</a:t>
-            </a:r>
-          </a:p>
-          <a:p>
-            <a:pPr>
-              <a:lnSpc>
-                <a:spcPct val="110000"/>
-              </a:lnSpc>
-            </a:pPr>
-            <a:r>
-              <a:rPr sz="1050">
-                <a:solidFill>
-                  <a:srgbClr val="5B594C"/>
-                </a:solidFill>
-              </a:rPr>
-              <a:t>Mantener los dashboards y asegurar la calidad
-de los datos.</a:t>
-            </a:r>
-          </a:p>
-        </p:txBody>
-      </p:sp>
-      <p:sp>
-        <p:nvSpPr>
-          <p:cNvPr id="11" name="TextBox 10"/>
-          <p:cNvSpPr txBox="1"/>
-          <p:nvPr/>
-        </p:nvSpPr>
-        <p:spPr>
-          <a:xfrm>
-            <a:off x="640080" y="5074920"/>
-            <a:ext cx="10881360" cy="914400"/>
-          </a:xfrm>
-          <a:prstGeom prst="rect">
-            <a:avLst/>
-          </a:prstGeom>
-          <a:noFill/>
-        </p:spPr>
-        <p:txBody>
-          <a:bodyPr wrap="square">
-            <a:spAutoFit/>
-          </a:bodyPr>
-          <a:lstStyle/>
-          <a:p>
-            <a:pPr algn="l">
-              <a:lnSpc>
-                <a:spcPct val="115000"/>
-              </a:lnSpc>
-            </a:pPr>
-            <a:r>
-              <a:rPr sz="1350" b="0" i="0">
-                <a:solidFill>
-                  <a:srgbClr val="5B594C"/>
-                </a:solidFill>
-                <a:latin typeface="Calibri"/>
-              </a:rPr>
-              <a:t>Esta charla se diseñó para Directorio y Gerencia General, quienes piden explícitamente indicadores consolidados y recomendaciones ejecutivas.</a:t>
-            </a:r>
-          </a:p>
-        </p:txBody>
-      </p:sp>
+        </p:spPr>
+      </p:pic>
     </p:spTree>
   </p:cSld>
   <p:clrMapOvr>
@@ -7226,7 +6593,7 @@
         </p:nvSpPr>
         <p:spPr>
           <a:xfrm>
-            <a:off x="0" y="0"/>
+            <a:off x="-15088" y="0"/>
             <a:ext cx="12191695" cy="6858000"/>
           </a:xfrm>
           <a:prstGeom prst="rect">
@@ -7291,212 +6658,41 @@
               </a:lnSpc>
             </a:pPr>
             <a:r>
-              <a:rPr sz="1300" b="1" i="0">
+              <a:rPr sz="1300" b="1">
                 <a:solidFill>
                   <a:srgbClr val="C85526"/>
                 </a:solidFill>
                 <a:latin typeface="Calibri"/>
               </a:rPr>
-              <a:t>PROPÓSITO Y ESTRATEGIA DE COMUNICACIÓN</a:t>
-            </a:r>
-          </a:p>
-        </p:txBody>
-      </p:sp>
-      <p:sp>
-        <p:nvSpPr>
-          <p:cNvPr id="4" name="TextBox 3"/>
-          <p:cNvSpPr txBox="1"/>
+              <a:t>CARACTERIZACIÓN · GÉNERO</a:t>
+            </a:r>
+          </a:p>
+        </p:txBody>
+      </p:sp>
+      <p:pic>
+        <p:nvPicPr>
+          <p:cNvPr id="5" name="Picture 4" descr="v3_top_generos.png"/>
+          <p:cNvPicPr>
+            <a:picLocks noChangeAspect="1"/>
+          </p:cNvPicPr>
           <p:nvPr/>
-        </p:nvSpPr>
-        <p:spPr>
-          <a:xfrm>
-            <a:off x="640080" y="777240"/>
-            <a:ext cx="10881360" cy="1005840"/>
+        </p:nvPicPr>
+        <p:blipFill>
+          <a:blip r:embed="rId3"/>
+          <a:stretch>
+            <a:fillRect/>
+          </a:stretch>
+        </p:blipFill>
+        <p:spPr>
+          <a:xfrm>
+            <a:off x="547551" y="1143428"/>
+            <a:ext cx="11096897" cy="4142841"/>
           </a:xfrm>
           <a:prstGeom prst="rect">
             <a:avLst/>
           </a:prstGeom>
-          <a:noFill/>
-        </p:spPr>
-        <p:txBody>
-          <a:bodyPr wrap="square">
-            <a:spAutoFit/>
-          </a:bodyPr>
-          <a:lstStyle/>
-          <a:p>
-            <a:pPr algn="l">
-              <a:lnSpc>
-                <a:spcPct val="115000"/>
-              </a:lnSpc>
-            </a:pPr>
-            <a:r>
-              <a:rPr sz="3000" b="1" i="0">
-                <a:solidFill>
-                  <a:srgbClr val="15150F"/>
-                </a:solidFill>
-                <a:latin typeface="Calibri"/>
-              </a:rPr>
-              <a:t>Por qué esta charla profundiza en un solo hallazgo</a:t>
-            </a:r>
-          </a:p>
-        </p:txBody>
-      </p:sp>
-      <p:sp>
-        <p:nvSpPr>
-          <p:cNvPr id="5" name="TextBox 4"/>
-          <p:cNvSpPr txBox="1"/>
-          <p:nvPr/>
-        </p:nvSpPr>
-        <p:spPr>
-          <a:xfrm>
-            <a:off x="640080" y="1874519"/>
-            <a:ext cx="10881360" cy="320040"/>
-          </a:xfrm>
-          <a:prstGeom prst="rect">
-            <a:avLst/>
-          </a:prstGeom>
-          <a:noFill/>
-        </p:spPr>
-        <p:txBody>
-          <a:bodyPr wrap="square">
-            <a:spAutoFit/>
-          </a:bodyPr>
-          <a:lstStyle/>
-          <a:p>
-            <a:pPr algn="l">
-              <a:lnSpc>
-                <a:spcPct val="115000"/>
-              </a:lnSpc>
-            </a:pPr>
-            <a:r>
-              <a:rPr sz="1200" b="1" i="0">
-                <a:solidFill>
-                  <a:srgbClr val="15150F"/>
-                </a:solidFill>
-                <a:latin typeface="Calibri"/>
-              </a:rPr>
-              <a:t>PROPÓSITO</a:t>
-            </a:r>
-          </a:p>
-        </p:txBody>
-      </p:sp>
-      <p:sp>
-        <p:nvSpPr>
-          <p:cNvPr id="6" name="TextBox 5"/>
-          <p:cNvSpPr txBox="1"/>
-          <p:nvPr/>
-        </p:nvSpPr>
-        <p:spPr>
-          <a:xfrm>
-            <a:off x="640080" y="2240280"/>
-            <a:ext cx="10881360" cy="914400"/>
-          </a:xfrm>
-          <a:prstGeom prst="rect">
-            <a:avLst/>
-          </a:prstGeom>
-          <a:noFill/>
-        </p:spPr>
-        <p:txBody>
-          <a:bodyPr wrap="square">
-            <a:spAutoFit/>
-          </a:bodyPr>
-          <a:lstStyle/>
-          <a:p>
-            <a:pPr algn="l">
-              <a:lnSpc>
-                <a:spcPct val="115000"/>
-              </a:lnSpc>
-            </a:pPr>
-            <a:r>
-              <a:rPr sz="1400" b="0" i="0">
-                <a:solidFill>
-                  <a:srgbClr val="5B594C"/>
-                </a:solidFill>
-                <a:latin typeface="Calibri"/>
-              </a:rPr>
-              <a:t>Los dashboards actuales de StreamView Analytics tienen exceso de información y poca interacción, lo que dificulta decidir. El propósito de esta charla es comunicar un hallazgo accionable con evidencia suficiente para decidir, no repetir ese exceso de información.</a:t>
-            </a:r>
-          </a:p>
-        </p:txBody>
-      </p:sp>
-      <p:sp>
-        <p:nvSpPr>
-          <p:cNvPr id="7" name="TextBox 6"/>
-          <p:cNvSpPr txBox="1"/>
-          <p:nvPr/>
-        </p:nvSpPr>
-        <p:spPr>
-          <a:xfrm>
-            <a:off x="640080" y="3703320"/>
-            <a:ext cx="10881360" cy="320040"/>
-          </a:xfrm>
-          <a:prstGeom prst="rect">
-            <a:avLst/>
-          </a:prstGeom>
-          <a:noFill/>
-        </p:spPr>
-        <p:txBody>
-          <a:bodyPr wrap="square">
-            <a:spAutoFit/>
-          </a:bodyPr>
-          <a:lstStyle/>
-          <a:p>
-            <a:pPr algn="l">
-              <a:lnSpc>
-                <a:spcPct val="115000"/>
-              </a:lnSpc>
-            </a:pPr>
-            <a:r>
-              <a:rPr sz="1200" b="1" i="0">
-                <a:solidFill>
-                  <a:srgbClr val="15150F"/>
-                </a:solidFill>
-                <a:latin typeface="Calibri"/>
-              </a:rPr>
-              <a:t>ESTRATEGIA</a:t>
-            </a:r>
-          </a:p>
-        </p:txBody>
-      </p:sp>
-      <p:sp>
-        <p:nvSpPr>
-          <p:cNvPr id="8" name="TextBox 7"/>
-          <p:cNvSpPr txBox="1"/>
-          <p:nvPr/>
-        </p:nvSpPr>
-        <p:spPr>
-          <a:xfrm>
-            <a:off x="640080" y="4069080"/>
-            <a:ext cx="10881360" cy="914400"/>
-          </a:xfrm>
-          <a:prstGeom prst="rect">
-            <a:avLst/>
-          </a:prstGeom>
-          <a:noFill/>
-        </p:spPr>
-        <p:txBody>
-          <a:bodyPr wrap="square">
-            <a:spAutoFit/>
-          </a:bodyPr>
-          <a:lstStyle/>
-          <a:p>
-            <a:pPr algn="l">
-              <a:lnSpc>
-                <a:spcPct val="115000"/>
-              </a:lnSpc>
-            </a:pPr>
-            <a:r>
-              <a:rPr sz="1400" b="0" i="0">
-                <a:solidFill>
-                  <a:srgbClr val="5B594C"/>
-                </a:solidFill>
-                <a:latin typeface="Calibri"/>
-              </a:rPr>
-              <a:t>Directorio y Gerencia General piden indicadores consolidados y recomendaciones ejecutivas, no un inventario de los 8 objetivos específicos del caso. Por eso se eligió profundidad sobre amplitud, un hallazgo, cuatro evidencias, una recomendación. Los 8 objetivos sí se cubren en detalle en el notebook (17 visualizaciones) y el dashboard (3 perfiles de usuario) que acompañan esta charla.</a:t>
-            </a:r>
-          </a:p>
-        </p:txBody>
-      </p:sp>
+        </p:spPr>
+      </p:pic>
     </p:spTree>
   </p:cSld>
   <p:clrMapOvr>
@@ -7530,7 +6726,7 @@
         </p:nvSpPr>
         <p:spPr>
           <a:xfrm>
-            <a:off x="0" y="0"/>
+            <a:off x="305" y="0"/>
             <a:ext cx="12191695" cy="6858000"/>
           </a:xfrm>
           <a:prstGeom prst="rect">
@@ -7563,7 +6759,7 @@
           <a:lstStyle/>
           <a:p>
             <a:pPr algn="ctr"/>
-            <a:endParaRPr/>
+            <a:endParaRPr dirty="0"/>
           </a:p>
         </p:txBody>
       </p:sp>
@@ -7595,13 +6791,13 @@
               </a:lnSpc>
             </a:pPr>
             <a:r>
-              <a:rPr sz="1300" b="1" i="0">
+              <a:rPr sz="1300" b="1">
                 <a:solidFill>
                   <a:srgbClr val="C85526"/>
                 </a:solidFill>
                 <a:latin typeface="Calibri"/>
               </a:rPr>
-              <a:t>EL CATÁLOGO</a:t>
+              <a:t>CARACTERIZACIÓN · PAÍS E IDIOMA</a:t>
             </a:r>
           </a:p>
         </p:txBody>
@@ -7634,38 +6830,202 @@
               </a:lnSpc>
             </a:pPr>
             <a:r>
-              <a:rPr sz="3000" b="1" i="0">
+              <a:rPr sz="3000" b="1" dirty="0">
                 <a:solidFill>
                   <a:srgbClr val="15150F"/>
                 </a:solidFill>
                 <a:latin typeface="Calibri"/>
               </a:rPr>
-              <a:t>Antes de responder, un vistazo a los datos</a:t>
-            </a:r>
-          </a:p>
-        </p:txBody>
-      </p:sp>
-      <p:sp>
-        <p:nvSpPr>
-          <p:cNvPr id="5" name="Rectangle 4"/>
+              <a:t>147 </a:t>
+            </a:r>
+            <a:r>
+              <a:rPr sz="3000" b="1" dirty="0" err="1">
+                <a:solidFill>
+                  <a:srgbClr val="15150F"/>
+                </a:solidFill>
+                <a:latin typeface="Calibri"/>
+              </a:rPr>
+              <a:t>países</a:t>
+            </a:r>
+            <a:r>
+              <a:rPr sz="3000" b="1" dirty="0">
+                <a:solidFill>
+                  <a:srgbClr val="15150F"/>
+                </a:solidFill>
+                <a:latin typeface="Calibri"/>
+              </a:rPr>
+              <a:t> y 82 </a:t>
+            </a:r>
+            <a:r>
+              <a:rPr sz="3000" b="1" dirty="0" err="1">
+                <a:solidFill>
+                  <a:srgbClr val="15150F"/>
+                </a:solidFill>
+                <a:latin typeface="Calibri"/>
+              </a:rPr>
+              <a:t>idiomas</a:t>
+            </a:r>
+            <a:r>
+              <a:rPr sz="3000" b="1" dirty="0">
+                <a:solidFill>
+                  <a:srgbClr val="15150F"/>
+                </a:solidFill>
+                <a:latin typeface="Calibri"/>
+              </a:rPr>
+              <a:t>, </a:t>
+            </a:r>
+            <a:r>
+              <a:rPr sz="3000" b="1" dirty="0" err="1">
+                <a:solidFill>
+                  <a:srgbClr val="15150F"/>
+                </a:solidFill>
+                <a:latin typeface="Calibri"/>
+              </a:rPr>
+              <a:t>pero</a:t>
+            </a:r>
+            <a:r>
+              <a:rPr sz="3000" b="1" dirty="0">
+                <a:solidFill>
+                  <a:srgbClr val="15150F"/>
+                </a:solidFill>
+                <a:latin typeface="Calibri"/>
+              </a:rPr>
+              <a:t> el </a:t>
+            </a:r>
+            <a:r>
+              <a:rPr sz="3000" b="1" dirty="0" err="1">
+                <a:solidFill>
+                  <a:srgbClr val="15150F"/>
+                </a:solidFill>
+                <a:latin typeface="Calibri"/>
+              </a:rPr>
+              <a:t>catálogo</a:t>
+            </a:r>
+            <a:r>
+              <a:rPr sz="3000" b="1" dirty="0">
+                <a:solidFill>
+                  <a:srgbClr val="15150F"/>
+                </a:solidFill>
+                <a:latin typeface="Calibri"/>
+              </a:rPr>
+              <a:t> se </a:t>
+            </a:r>
+            <a:r>
+              <a:rPr sz="3000" b="1" dirty="0" err="1">
+                <a:solidFill>
+                  <a:srgbClr val="15150F"/>
+                </a:solidFill>
+                <a:latin typeface="Calibri"/>
+              </a:rPr>
+              <a:t>concentra</a:t>
+            </a:r>
+            <a:r>
+              <a:rPr sz="3000" b="1" dirty="0">
+                <a:solidFill>
+                  <a:srgbClr val="15150F"/>
+                </a:solidFill>
+                <a:latin typeface="Calibri"/>
+              </a:rPr>
+              <a:t> </a:t>
+            </a:r>
+            <a:r>
+              <a:rPr sz="3000" b="1" dirty="0" err="1">
+                <a:solidFill>
+                  <a:srgbClr val="15150F"/>
+                </a:solidFill>
+                <a:latin typeface="Calibri"/>
+              </a:rPr>
+              <a:t>fuerte</a:t>
+            </a:r>
+            <a:endParaRPr sz="3000" b="1" dirty="0">
+              <a:solidFill>
+                <a:srgbClr val="15150F"/>
+              </a:solidFill>
+              <a:latin typeface="Calibri"/>
+            </a:endParaRPr>
+          </a:p>
+        </p:txBody>
+      </p:sp>
+      <p:pic>
+        <p:nvPicPr>
+          <p:cNvPr id="5" name="Picture 4" descr="v5_top_paises.png"/>
+          <p:cNvPicPr>
+            <a:picLocks noChangeAspect="1"/>
+          </p:cNvPicPr>
+          <p:nvPr/>
+        </p:nvPicPr>
+        <p:blipFill>
+          <a:blip r:embed="rId3"/>
+          <a:stretch>
+            <a:fillRect/>
+          </a:stretch>
+        </p:blipFill>
+        <p:spPr>
+          <a:xfrm>
+            <a:off x="345629" y="1783080"/>
+            <a:ext cx="11500742" cy="4293611"/>
+          </a:xfrm>
+          <a:prstGeom prst="rect">
+            <a:avLst/>
+          </a:prstGeom>
+        </p:spPr>
+      </p:pic>
+    </p:spTree>
+  </p:cSld>
+  <p:clrMapOvr>
+    <a:masterClrMapping/>
+  </p:clrMapOvr>
+</p:sld>
+</file>
+
+<file path=ppt/slides/slide5.xml><?xml version="1.0" encoding="utf-8"?>
+<p:sld xmlns:a="http://schemas.openxmlformats.org/drawingml/2006/main" xmlns:r="http://schemas.openxmlformats.org/officeDocument/2006/relationships" xmlns:p="http://schemas.openxmlformats.org/presentationml/2006/main">
+  <p:cSld>
+    <p:spTree>
+      <p:nvGrpSpPr>
+        <p:cNvPr id="1" name="">
+          <a:extLst>
+            <a:ext uri="{FF2B5EF4-FFF2-40B4-BE49-F238E27FC236}">
+              <a16:creationId xmlns:a16="http://schemas.microsoft.com/office/drawing/2014/main" id="{6DA3B16A-120C-1972-9D56-DF8D84AB4077}"/>
+            </a:ext>
+          </a:extLst>
+        </p:cNvPr>
+        <p:cNvGrpSpPr/>
+        <p:nvPr/>
+      </p:nvGrpSpPr>
+      <p:grpSpPr>
+        <a:xfrm>
+          <a:off x="0" y="0"/>
+          <a:ext cx="0" cy="0"/>
+          <a:chOff x="0" y="0"/>
+          <a:chExt cx="0" cy="0"/>
+        </a:xfrm>
+      </p:grpSpPr>
+      <p:sp>
+        <p:nvSpPr>
+          <p:cNvPr id="2" name="Rectangle 1">
+            <a:extLst>
+              <a:ext uri="{FF2B5EF4-FFF2-40B4-BE49-F238E27FC236}">
+                <a16:creationId xmlns:a16="http://schemas.microsoft.com/office/drawing/2014/main" id="{5BD3CDDC-AA6B-979A-9332-2ECE3E96A2D2}"/>
+              </a:ext>
+            </a:extLst>
+          </p:cNvPr>
           <p:cNvSpPr/>
           <p:nvPr/>
         </p:nvSpPr>
         <p:spPr>
           <a:xfrm>
-            <a:off x="640080" y="2377440"/>
-            <a:ext cx="2103120" cy="1463040"/>
+            <a:off x="305" y="0"/>
+            <a:ext cx="12191695" cy="6858000"/>
           </a:xfrm>
           <a:prstGeom prst="rect">
             <a:avLst/>
           </a:prstGeom>
           <a:solidFill>
-            <a:srgbClr val="FFFFFF"/>
+            <a:srgbClr val="F6F4EE"/>
           </a:solidFill>
-          <a:ln w="9525">
-            <a:solidFill>
-              <a:srgbClr val="DDD8C6"/>
-            </a:solidFill>
+          <a:ln>
+            <a:noFill/>
           </a:ln>
           <a:effectLst/>
         </p:spPr>
@@ -7684,365 +7044,23 @@
           </a:fontRef>
         </p:style>
         <p:txBody>
-          <a:bodyPr wrap="square" lIns="137160" rtlCol="0" anchor="ctr"/>
+          <a:bodyPr rtlCol="0" anchor="ctr"/>
           <a:lstStyle/>
           <a:p>
             <a:pPr algn="ctr"/>
-            <a:r>
-              <a:rPr sz="2400" b="1">
-                <a:solidFill>
-                  <a:srgbClr val="2A78D6"/>
-                </a:solidFill>
-              </a:rPr>
-              <a:t>31.991</a:t>
-            </a:r>
-          </a:p>
-          <a:p>
-            <a:pPr algn="ctr"/>
-            <a:r>
-              <a:rPr sz="1000">
-                <a:solidFill>
-                  <a:srgbClr val="918F7F"/>
-                </a:solidFill>
-              </a:rPr>
-              <a:t>TÍTULOS</a:t>
-            </a:r>
-          </a:p>
-        </p:txBody>
-      </p:sp>
-      <p:sp>
-        <p:nvSpPr>
-          <p:cNvPr id="6" name="Rectangle 5"/>
-          <p:cNvSpPr/>
-          <p:nvPr/>
-        </p:nvSpPr>
-        <p:spPr>
-          <a:xfrm>
-            <a:off x="2834640" y="2377440"/>
-            <a:ext cx="2103120" cy="1463040"/>
-          </a:xfrm>
-          <a:prstGeom prst="rect">
-            <a:avLst/>
-          </a:prstGeom>
-          <a:solidFill>
-            <a:srgbClr val="FFFFFF"/>
-          </a:solidFill>
-          <a:ln w="9525">
-            <a:solidFill>
-              <a:srgbClr val="DDD8C6"/>
-            </a:solidFill>
-          </a:ln>
-          <a:effectLst/>
-        </p:spPr>
-        <p:style>
-          <a:lnRef idx="1">
-            <a:schemeClr val="accent1"/>
-          </a:lnRef>
-          <a:fillRef idx="3">
-            <a:schemeClr val="accent1"/>
-          </a:fillRef>
-          <a:effectRef idx="2">
-            <a:schemeClr val="accent1"/>
-          </a:effectRef>
-          <a:fontRef idx="minor">
-            <a:schemeClr val="lt1"/>
-          </a:fontRef>
-        </p:style>
-        <p:txBody>
-          <a:bodyPr wrap="square" lIns="137160" rtlCol="0" anchor="ctr"/>
-          <a:lstStyle/>
-          <a:p>
-            <a:pPr algn="ctr"/>
-            <a:r>
-              <a:rPr sz="2400" b="1">
-                <a:solidFill>
-                  <a:srgbClr val="2A78D6"/>
-                </a:solidFill>
-              </a:rPr>
-              <a:t>16.000 / 15.991</a:t>
-            </a:r>
-          </a:p>
-          <a:p>
-            <a:pPr algn="ctr"/>
-            <a:r>
-              <a:rPr sz="1000">
-                <a:solidFill>
-                  <a:srgbClr val="918F7F"/>
-                </a:solidFill>
-              </a:rPr>
-              <a:t>PELÍCULAS / SERIES</a:t>
-            </a:r>
-          </a:p>
-        </p:txBody>
-      </p:sp>
-      <p:sp>
-        <p:nvSpPr>
-          <p:cNvPr id="7" name="Rectangle 6"/>
-          <p:cNvSpPr/>
-          <p:nvPr/>
-        </p:nvSpPr>
-        <p:spPr>
-          <a:xfrm>
-            <a:off x="5029200" y="2377440"/>
-            <a:ext cx="2103120" cy="1463040"/>
-          </a:xfrm>
-          <a:prstGeom prst="rect">
-            <a:avLst/>
-          </a:prstGeom>
-          <a:solidFill>
-            <a:srgbClr val="FFFFFF"/>
-          </a:solidFill>
-          <a:ln w="9525">
-            <a:solidFill>
-              <a:srgbClr val="DDD8C6"/>
-            </a:solidFill>
-          </a:ln>
-          <a:effectLst/>
-        </p:spPr>
-        <p:style>
-          <a:lnRef idx="1">
-            <a:schemeClr val="accent1"/>
-          </a:lnRef>
-          <a:fillRef idx="3">
-            <a:schemeClr val="accent1"/>
-          </a:fillRef>
-          <a:effectRef idx="2">
-            <a:schemeClr val="accent1"/>
-          </a:effectRef>
-          <a:fontRef idx="minor">
-            <a:schemeClr val="lt1"/>
-          </a:fontRef>
-        </p:style>
-        <p:txBody>
-          <a:bodyPr wrap="square" lIns="137160" rtlCol="0" anchor="ctr"/>
-          <a:lstStyle/>
-          <a:p>
-            <a:pPr algn="ctr"/>
-            <a:r>
-              <a:rPr sz="2400" b="1">
-                <a:solidFill>
-                  <a:srgbClr val="2A78D6"/>
-                </a:solidFill>
-              </a:rPr>
-              <a:t>147</a:t>
-            </a:r>
-          </a:p>
-          <a:p>
-            <a:pPr algn="ctr"/>
-            <a:r>
-              <a:rPr sz="1000">
-                <a:solidFill>
-                  <a:srgbClr val="918F7F"/>
-                </a:solidFill>
-              </a:rPr>
-              <a:t>PAÍSES</a:t>
-            </a:r>
-          </a:p>
-        </p:txBody>
-      </p:sp>
-      <p:sp>
-        <p:nvSpPr>
-          <p:cNvPr id="8" name="Rectangle 7"/>
-          <p:cNvSpPr/>
-          <p:nvPr/>
-        </p:nvSpPr>
-        <p:spPr>
-          <a:xfrm>
-            <a:off x="7223760" y="2377440"/>
-            <a:ext cx="2103120" cy="1463040"/>
-          </a:xfrm>
-          <a:prstGeom prst="rect">
-            <a:avLst/>
-          </a:prstGeom>
-          <a:solidFill>
-            <a:srgbClr val="FFFFFF"/>
-          </a:solidFill>
-          <a:ln w="9525">
-            <a:solidFill>
-              <a:srgbClr val="DDD8C6"/>
-            </a:solidFill>
-          </a:ln>
-          <a:effectLst/>
-        </p:spPr>
-        <p:style>
-          <a:lnRef idx="1">
-            <a:schemeClr val="accent1"/>
-          </a:lnRef>
-          <a:fillRef idx="3">
-            <a:schemeClr val="accent1"/>
-          </a:fillRef>
-          <a:effectRef idx="2">
-            <a:schemeClr val="accent1"/>
-          </a:effectRef>
-          <a:fontRef idx="minor">
-            <a:schemeClr val="lt1"/>
-          </a:fontRef>
-        </p:style>
-        <p:txBody>
-          <a:bodyPr wrap="square" lIns="137160" rtlCol="0" anchor="ctr"/>
-          <a:lstStyle/>
-          <a:p>
-            <a:pPr algn="ctr"/>
-            <a:r>
-              <a:rPr sz="2400" b="1">
-                <a:solidFill>
-                  <a:srgbClr val="2A78D6"/>
-                </a:solidFill>
-              </a:rPr>
-              <a:t>83</a:t>
-            </a:r>
-          </a:p>
-          <a:p>
-            <a:pPr algn="ctr"/>
-            <a:r>
-              <a:rPr sz="1000">
-                <a:solidFill>
-                  <a:srgbClr val="918F7F"/>
-                </a:solidFill>
-              </a:rPr>
-              <a:t>IDIOMAS</a:t>
-            </a:r>
-          </a:p>
-        </p:txBody>
-      </p:sp>
-      <p:sp>
-        <p:nvSpPr>
-          <p:cNvPr id="9" name="Rectangle 8"/>
-          <p:cNvSpPr/>
-          <p:nvPr/>
-        </p:nvSpPr>
-        <p:spPr>
-          <a:xfrm>
-            <a:off x="9418320" y="2377440"/>
-            <a:ext cx="2103120" cy="1463040"/>
-          </a:xfrm>
-          <a:prstGeom prst="rect">
-            <a:avLst/>
-          </a:prstGeom>
-          <a:solidFill>
-            <a:srgbClr val="FFFFFF"/>
-          </a:solidFill>
-          <a:ln w="9525">
-            <a:solidFill>
-              <a:srgbClr val="DDD8C6"/>
-            </a:solidFill>
-          </a:ln>
-          <a:effectLst/>
-        </p:spPr>
-        <p:style>
-          <a:lnRef idx="1">
-            <a:schemeClr val="accent1"/>
-          </a:lnRef>
-          <a:fillRef idx="3">
-            <a:schemeClr val="accent1"/>
-          </a:fillRef>
-          <a:effectRef idx="2">
-            <a:schemeClr val="accent1"/>
-          </a:effectRef>
-          <a:fontRef idx="minor">
-            <a:schemeClr val="lt1"/>
-          </a:fontRef>
-        </p:style>
-        <p:txBody>
-          <a:bodyPr wrap="square" lIns="137160" rtlCol="0" anchor="ctr"/>
-          <a:lstStyle/>
-          <a:p>
-            <a:pPr algn="ctr"/>
-            <a:r>
-              <a:rPr sz="2400" b="1">
-                <a:solidFill>
-                  <a:srgbClr val="2A78D6"/>
-                </a:solidFill>
-              </a:rPr>
-              <a:t>24</a:t>
-            </a:r>
-          </a:p>
-          <a:p>
-            <a:pPr algn="ctr"/>
-            <a:r>
-              <a:rPr sz="1000">
-                <a:solidFill>
-                  <a:srgbClr val="918F7F"/>
-                </a:solidFill>
-              </a:rPr>
-              <a:t>GÉNEROS</a:t>
-            </a:r>
-          </a:p>
-        </p:txBody>
-      </p:sp>
-    </p:spTree>
-  </p:cSld>
-  <p:clrMapOvr>
-    <a:masterClrMapping/>
-  </p:clrMapOvr>
-</p:sld>
-</file>
-
-<file path=ppt/slides/slide5.xml><?xml version="1.0" encoding="utf-8"?>
-<p:sld xmlns:a="http://schemas.openxmlformats.org/drawingml/2006/main" xmlns:r="http://schemas.openxmlformats.org/officeDocument/2006/relationships" xmlns:p="http://schemas.openxmlformats.org/presentationml/2006/main">
-  <p:cSld>
-    <p:spTree>
-      <p:nvGrpSpPr>
-        <p:cNvPr id="1" name=""/>
-        <p:cNvGrpSpPr/>
-        <p:nvPr/>
-      </p:nvGrpSpPr>
-      <p:grpSpPr>
-        <a:xfrm>
-          <a:off x="0" y="0"/>
-          <a:ext cx="0" cy="0"/>
-          <a:chOff x="0" y="0"/>
-          <a:chExt cx="0" cy="0"/>
-        </a:xfrm>
-      </p:grpSpPr>
-      <p:sp>
-        <p:nvSpPr>
-          <p:cNvPr id="2" name="Rectangle 1"/>
-          <p:cNvSpPr/>
-          <p:nvPr/>
-        </p:nvSpPr>
-        <p:spPr>
-          <a:xfrm>
-            <a:off x="0" y="0"/>
-            <a:ext cx="12191695" cy="6858000"/>
-          </a:xfrm>
-          <a:prstGeom prst="rect">
-            <a:avLst/>
-          </a:prstGeom>
-          <a:solidFill>
-            <a:srgbClr val="F6F4EE"/>
-          </a:solidFill>
-          <a:ln>
-            <a:noFill/>
-          </a:ln>
-          <a:effectLst/>
-        </p:spPr>
-        <p:style>
-          <a:lnRef idx="1">
-            <a:schemeClr val="accent1"/>
-          </a:lnRef>
-          <a:fillRef idx="3">
-            <a:schemeClr val="accent1"/>
-          </a:fillRef>
-          <a:effectRef idx="2">
-            <a:schemeClr val="accent1"/>
-          </a:effectRef>
-          <a:fontRef idx="minor">
-            <a:schemeClr val="lt1"/>
-          </a:fontRef>
-        </p:style>
-        <p:txBody>
-          <a:bodyPr rtlCol="0" anchor="ctr"/>
-          <a:lstStyle/>
-          <a:p>
-            <a:pPr algn="ctr"/>
-            <a:endParaRPr/>
-          </a:p>
-        </p:txBody>
-      </p:sp>
-      <p:sp>
-        <p:nvSpPr>
-          <p:cNvPr id="3" name="TextBox 2"/>
+            <a:endParaRPr dirty="0"/>
+          </a:p>
+        </p:txBody>
+      </p:sp>
+      <p:sp>
+        <p:nvSpPr>
+          <p:cNvPr id="3" name="TextBox 2">
+            <a:extLst>
+              <a:ext uri="{FF2B5EF4-FFF2-40B4-BE49-F238E27FC236}">
+                <a16:creationId xmlns:a16="http://schemas.microsoft.com/office/drawing/2014/main" id="{5F4DE84A-40B8-1EEC-C44B-C86FD4721BC6}"/>
+              </a:ext>
+            </a:extLst>
+          </p:cNvPr>
           <p:cNvSpPr txBox="1"/>
           <p:nvPr/>
         </p:nvSpPr>
@@ -8068,20 +7086,26 @@
               </a:lnSpc>
             </a:pPr>
             <a:r>
-              <a:rPr sz="1300" b="1" i="0">
+              <a:rPr sz="1300" b="1">
                 <a:solidFill>
                   <a:srgbClr val="C85526"/>
                 </a:solidFill>
                 <a:latin typeface="Calibri"/>
               </a:rPr>
-              <a:t>CARACTERIZACIÓN · GÉNERO</a:t>
-            </a:r>
-          </a:p>
-        </p:txBody>
-      </p:sp>
-      <p:sp>
-        <p:nvSpPr>
-          <p:cNvPr id="4" name="TextBox 3"/>
+              <a:t>CARACTERIZACIÓN · PAÍS E IDIOMA</a:t>
+            </a:r>
+          </a:p>
+        </p:txBody>
+      </p:sp>
+      <p:sp>
+        <p:nvSpPr>
+          <p:cNvPr id="4" name="TextBox 3">
+            <a:extLst>
+              <a:ext uri="{FF2B5EF4-FFF2-40B4-BE49-F238E27FC236}">
+                <a16:creationId xmlns:a16="http://schemas.microsoft.com/office/drawing/2014/main" id="{EE156E99-2F0E-AD3F-BBF9-7C82F062A608}"/>
+              </a:ext>
+            </a:extLst>
+          </p:cNvPr>
           <p:cNvSpPr txBox="1"/>
           <p:nvPr/>
         </p:nvSpPr>
@@ -8107,20 +7131,26 @@
               </a:lnSpc>
             </a:pPr>
             <a:r>
-              <a:rPr sz="3000" b="1" i="0">
+              <a:rPr sz="3000" b="1">
                 <a:solidFill>
                   <a:srgbClr val="15150F"/>
                 </a:solidFill>
                 <a:latin typeface="Calibri"/>
               </a:rPr>
-              <a:t>Drama y Comedia dominan, el resto se reparte gradual</a:t>
+              <a:t>147 países y 82 idiomas, pero el catálogo se concentra fuerte</a:t>
             </a:r>
           </a:p>
         </p:txBody>
       </p:sp>
       <p:pic>
         <p:nvPicPr>
-          <p:cNvPr id="5" name="Picture 4" descr="v3_top_generos.png"/>
+          <p:cNvPr id="7" name="Picture 6" descr="v17_idiomas_predominantes.png">
+            <a:extLst>
+              <a:ext uri="{FF2B5EF4-FFF2-40B4-BE49-F238E27FC236}">
+                <a16:creationId xmlns:a16="http://schemas.microsoft.com/office/drawing/2014/main" id="{0E66BCD0-270E-41AB-778F-AFD8ABA121E2}"/>
+              </a:ext>
+            </a:extLst>
+          </p:cNvPr>
           <p:cNvPicPr>
             <a:picLocks noChangeAspect="1"/>
           </p:cNvPicPr>
@@ -8134,60 +7164,20 @@
         </p:blipFill>
         <p:spPr>
           <a:xfrm>
-            <a:off x="640080" y="1737360"/>
-            <a:ext cx="10881360" cy="4062374"/>
+            <a:off x="1297262" y="1566152"/>
+            <a:ext cx="8866566" cy="4965276"/>
           </a:xfrm>
           <a:prstGeom prst="rect">
             <a:avLst/>
           </a:prstGeom>
         </p:spPr>
       </p:pic>
-      <p:sp>
-        <p:nvSpPr>
-          <p:cNvPr id="6" name="Rectangle 5"/>
-          <p:cNvSpPr/>
-          <p:nvPr/>
-        </p:nvSpPr>
-        <p:spPr>
-          <a:xfrm>
-            <a:off x="640080" y="1737360"/>
-            <a:ext cx="10881360" cy="4062374"/>
-          </a:xfrm>
-          <a:prstGeom prst="rect">
-            <a:avLst/>
-          </a:prstGeom>
-          <a:noFill/>
-          <a:ln w="9525">
-            <a:solidFill>
-              <a:srgbClr val="DDD8C6"/>
-            </a:solidFill>
-          </a:ln>
-          <a:effectLst/>
-        </p:spPr>
-        <p:style>
-          <a:lnRef idx="1">
-            <a:schemeClr val="accent1"/>
-          </a:lnRef>
-          <a:fillRef idx="3">
-            <a:schemeClr val="accent1"/>
-          </a:fillRef>
-          <a:effectRef idx="2">
-            <a:schemeClr val="accent1"/>
-          </a:effectRef>
-          <a:fontRef idx="minor">
-            <a:schemeClr val="lt1"/>
-          </a:fontRef>
-        </p:style>
-        <p:txBody>
-          <a:bodyPr rtlCol="0" anchor="ctr"/>
-          <a:lstStyle/>
-          <a:p>
-            <a:pPr algn="ctr"/>
-            <a:endParaRPr/>
-          </a:p>
-        </p:txBody>
-      </p:sp>
     </p:spTree>
+    <p:extLst>
+      <p:ext uri="{BB962C8B-B14F-4D97-AF65-F5344CB8AC3E}">
+        <p14:creationId xmlns:p14="http://schemas.microsoft.com/office/powerpoint/2010/main" val="3889983380"/>
+      </p:ext>
+    </p:extLst>
   </p:cSld>
   <p:clrMapOvr>
     <a:masterClrMapping/>
@@ -8220,7 +7210,7 @@
         </p:nvSpPr>
         <p:spPr>
           <a:xfrm>
-            <a:off x="0" y="0"/>
+            <a:off x="305" y="0"/>
             <a:ext cx="12191695" cy="6858000"/>
           </a:xfrm>
           <a:prstGeom prst="rect">
@@ -8285,59 +7275,20 @@
               </a:lnSpc>
             </a:pPr>
             <a:r>
-              <a:rPr sz="1300" b="1" i="0">
+              <a:rPr sz="1300" b="1">
                 <a:solidFill>
                   <a:srgbClr val="C85526"/>
                 </a:solidFill>
                 <a:latin typeface="Calibri"/>
               </a:rPr>
-              <a:t>CARACTERIZACIÓN · PAÍS E IDIOMA</a:t>
-            </a:r>
-          </a:p>
-        </p:txBody>
-      </p:sp>
-      <p:sp>
-        <p:nvSpPr>
-          <p:cNvPr id="4" name="TextBox 3"/>
-          <p:cNvSpPr txBox="1"/>
-          <p:nvPr/>
-        </p:nvSpPr>
-        <p:spPr>
-          <a:xfrm>
-            <a:off x="640080" y="777240"/>
-            <a:ext cx="10881360" cy="1005840"/>
-          </a:xfrm>
-          <a:prstGeom prst="rect">
-            <a:avLst/>
-          </a:prstGeom>
-          <a:noFill/>
-        </p:spPr>
-        <p:txBody>
-          <a:bodyPr wrap="square">
-            <a:spAutoFit/>
-          </a:bodyPr>
-          <a:lstStyle/>
-          <a:p>
-            <a:pPr algn="l">
-              <a:lnSpc>
-                <a:spcPct val="115000"/>
-              </a:lnSpc>
-            </a:pPr>
-            <a:r>
-              <a:rPr sz="3000" b="1" i="0">
-                <a:solidFill>
-                  <a:srgbClr val="15150F"/>
-                </a:solidFill>
-                <a:latin typeface="Calibri"/>
-              </a:rPr>
-              <a:t>147 países y 83 idiomas, pero el catálogo se concentra fuerte</a:t>
+              <a:t>ANTES DE SEGUIR · CALIDAD DE DATOS</a:t>
             </a:r>
           </a:p>
         </p:txBody>
       </p:sp>
       <p:pic>
         <p:nvPicPr>
-          <p:cNvPr id="5" name="Picture 4" descr="v5_top_paises.png"/>
+          <p:cNvPr id="5" name="Picture 4" descr="v10_uniformidad_anual.png"/>
           <p:cNvPicPr>
             <a:picLocks noChangeAspect="1"/>
           </p:cNvPicPr>
@@ -8351,128 +7302,14 @@
         </p:blipFill>
         <p:spPr>
           <a:xfrm>
-            <a:off x="457200" y="1737360"/>
-            <a:ext cx="5577840" cy="2082394"/>
+            <a:off x="663803" y="1023039"/>
+            <a:ext cx="10864393" cy="4992189"/>
           </a:xfrm>
           <a:prstGeom prst="rect">
             <a:avLst/>
           </a:prstGeom>
         </p:spPr>
       </p:pic>
-      <p:sp>
-        <p:nvSpPr>
-          <p:cNvPr id="6" name="Rectangle 5"/>
-          <p:cNvSpPr/>
-          <p:nvPr/>
-        </p:nvSpPr>
-        <p:spPr>
-          <a:xfrm>
-            <a:off x="457200" y="1737360"/>
-            <a:ext cx="5577840" cy="2082394"/>
-          </a:xfrm>
-          <a:prstGeom prst="rect">
-            <a:avLst/>
-          </a:prstGeom>
-          <a:noFill/>
-          <a:ln w="9525">
-            <a:solidFill>
-              <a:srgbClr val="DDD8C6"/>
-            </a:solidFill>
-          </a:ln>
-          <a:effectLst/>
-        </p:spPr>
-        <p:style>
-          <a:lnRef idx="1">
-            <a:schemeClr val="accent1"/>
-          </a:lnRef>
-          <a:fillRef idx="3">
-            <a:schemeClr val="accent1"/>
-          </a:fillRef>
-          <a:effectRef idx="2">
-            <a:schemeClr val="accent1"/>
-          </a:effectRef>
-          <a:fontRef idx="minor">
-            <a:schemeClr val="lt1"/>
-          </a:fontRef>
-        </p:style>
-        <p:txBody>
-          <a:bodyPr rtlCol="0" anchor="ctr"/>
-          <a:lstStyle/>
-          <a:p>
-            <a:pPr algn="ctr"/>
-            <a:endParaRPr/>
-          </a:p>
-        </p:txBody>
-      </p:sp>
-      <p:pic>
-        <p:nvPicPr>
-          <p:cNvPr id="7" name="Picture 6" descr="v17_idiomas_predominantes.png"/>
-          <p:cNvPicPr>
-            <a:picLocks noChangeAspect="1"/>
-          </p:cNvPicPr>
-          <p:nvPr/>
-        </p:nvPicPr>
-        <p:blipFill>
-          <a:blip r:embed="rId4"/>
-          <a:stretch>
-            <a:fillRect/>
-          </a:stretch>
-        </p:blipFill>
-        <p:spPr>
-          <a:xfrm>
-            <a:off x="6172200" y="1737360"/>
-            <a:ext cx="5577840" cy="3123590"/>
-          </a:xfrm>
-          <a:prstGeom prst="rect">
-            <a:avLst/>
-          </a:prstGeom>
-        </p:spPr>
-      </p:pic>
-      <p:sp>
-        <p:nvSpPr>
-          <p:cNvPr id="8" name="Rectangle 7"/>
-          <p:cNvSpPr/>
-          <p:nvPr/>
-        </p:nvSpPr>
-        <p:spPr>
-          <a:xfrm>
-            <a:off x="6172200" y="1737360"/>
-            <a:ext cx="5577840" cy="3123590"/>
-          </a:xfrm>
-          <a:prstGeom prst="rect">
-            <a:avLst/>
-          </a:prstGeom>
-          <a:noFill/>
-          <a:ln w="9525">
-            <a:solidFill>
-              <a:srgbClr val="DDD8C6"/>
-            </a:solidFill>
-          </a:ln>
-          <a:effectLst/>
-        </p:spPr>
-        <p:style>
-          <a:lnRef idx="1">
-            <a:schemeClr val="accent1"/>
-          </a:lnRef>
-          <a:fillRef idx="3">
-            <a:schemeClr val="accent1"/>
-          </a:fillRef>
-          <a:effectRef idx="2">
-            <a:schemeClr val="accent1"/>
-          </a:effectRef>
-          <a:fontRef idx="minor">
-            <a:schemeClr val="lt1"/>
-          </a:fontRef>
-        </p:style>
-        <p:txBody>
-          <a:bodyPr rtlCol="0" anchor="ctr"/>
-          <a:lstStyle/>
-          <a:p>
-            <a:pPr algn="ctr"/>
-            <a:endParaRPr/>
-          </a:p>
-        </p:txBody>
-      </p:sp>
     </p:spTree>
   </p:cSld>
   <p:clrMapOvr>
@@ -8506,7 +7343,7 @@
         </p:nvSpPr>
         <p:spPr>
           <a:xfrm>
-            <a:off x="0" y="0"/>
+            <a:off x="-15088" y="0"/>
             <a:ext cx="12191695" cy="6858000"/>
           </a:xfrm>
           <a:prstGeom prst="rect">
@@ -8552,7 +7389,7 @@
         <p:spPr>
           <a:xfrm>
             <a:off x="640080" y="457200"/>
-            <a:ext cx="10881360" cy="365760"/>
+            <a:ext cx="10881360" cy="308867"/>
           </a:xfrm>
           <a:prstGeom prst="rect">
             <a:avLst/>
@@ -8571,59 +7408,26 @@
               </a:lnSpc>
             </a:pPr>
             <a:r>
-              <a:rPr sz="1300" b="1" i="0">
+              <a:rPr lang="es-419" sz="1300" b="1" dirty="0">
                 <a:solidFill>
                   <a:srgbClr val="C85526"/>
                 </a:solidFill>
                 <a:latin typeface="Calibri"/>
               </a:rPr>
-              <a:t>ANTES DE SEGUIR · CALIDAD DE DATOS</a:t>
-            </a:r>
-          </a:p>
-        </p:txBody>
-      </p:sp>
-      <p:sp>
-        <p:nvSpPr>
-          <p:cNvPr id="4" name="TextBox 3"/>
-          <p:cNvSpPr txBox="1"/>
-          <p:nvPr/>
-        </p:nvSpPr>
-        <p:spPr>
-          <a:xfrm>
-            <a:off x="640080" y="777240"/>
-            <a:ext cx="10881360" cy="1005840"/>
-          </a:xfrm>
-          <a:prstGeom prst="rect">
-            <a:avLst/>
-          </a:prstGeom>
-          <a:noFill/>
-        </p:spPr>
-        <p:txBody>
-          <a:bodyPr wrap="square">
-            <a:spAutoFit/>
-          </a:bodyPr>
-          <a:lstStyle/>
-          <a:p>
-            <a:pPr algn="l">
-              <a:lnSpc>
-                <a:spcPct val="115000"/>
-              </a:lnSpc>
-            </a:pPr>
-            <a:r>
-              <a:rPr sz="3000" b="1" i="0">
-                <a:solidFill>
-                  <a:srgbClr val="15150F"/>
-                </a:solidFill>
-                <a:latin typeface="Calibri"/>
-              </a:rPr>
-              <a:t>Un catálogo perfectamente parejo no es una tendencia, es una alerta</a:t>
-            </a:r>
+              <a:t>¿QUÉ NOS DICEN LOS DATOS?</a:t>
+            </a:r>
+            <a:endParaRPr sz="1300" b="1" dirty="0">
+              <a:solidFill>
+                <a:srgbClr val="C85526"/>
+              </a:solidFill>
+              <a:latin typeface="Calibri"/>
+            </a:endParaRPr>
           </a:p>
         </p:txBody>
       </p:sp>
       <p:pic>
         <p:nvPicPr>
-          <p:cNvPr id="5" name="Picture 4" descr="v10_uniformidad_anual.png"/>
+          <p:cNvPr id="5" name="Picture 4" descr="v6_dispersion_popularidad_calificacion.png"/>
           <p:cNvPicPr>
             <a:picLocks noChangeAspect="1"/>
           </p:cNvPicPr>
@@ -8637,59 +7441,14 @@
         </p:blipFill>
         <p:spPr>
           <a:xfrm>
-            <a:off x="1463040" y="1837075"/>
-            <a:ext cx="9235440" cy="4243685"/>
+            <a:off x="1293767" y="1022299"/>
+            <a:ext cx="9604465" cy="5378501"/>
           </a:xfrm>
           <a:prstGeom prst="rect">
             <a:avLst/>
           </a:prstGeom>
         </p:spPr>
       </p:pic>
-      <p:sp>
-        <p:nvSpPr>
-          <p:cNvPr id="6" name="Rectangle 5"/>
-          <p:cNvSpPr/>
-          <p:nvPr/>
-        </p:nvSpPr>
-        <p:spPr>
-          <a:xfrm>
-            <a:off x="1463040" y="1737360"/>
-            <a:ext cx="9235440" cy="4243685"/>
-          </a:xfrm>
-          <a:prstGeom prst="rect">
-            <a:avLst/>
-          </a:prstGeom>
-          <a:noFill/>
-          <a:ln w="9525">
-            <a:solidFill>
-              <a:srgbClr val="DDD8C6"/>
-            </a:solidFill>
-          </a:ln>
-          <a:effectLst/>
-        </p:spPr>
-        <p:style>
-          <a:lnRef idx="1">
-            <a:schemeClr val="accent1"/>
-          </a:lnRef>
-          <a:fillRef idx="3">
-            <a:schemeClr val="accent1"/>
-          </a:fillRef>
-          <a:effectRef idx="2">
-            <a:schemeClr val="accent1"/>
-          </a:effectRef>
-          <a:fontRef idx="minor">
-            <a:schemeClr val="lt1"/>
-          </a:fontRef>
-        </p:style>
-        <p:txBody>
-          <a:bodyPr rtlCol="0" anchor="ctr"/>
-          <a:lstStyle/>
-          <a:p>
-            <a:pPr algn="ctr"/>
-            <a:endParaRPr/>
-          </a:p>
-        </p:txBody>
-      </p:sp>
     </p:spTree>
   </p:cSld>
   <p:clrMapOvr>
@@ -8788,13 +7547,13 @@
               </a:lnSpc>
             </a:pPr>
             <a:r>
-              <a:rPr sz="1300" b="1" i="0">
+              <a:rPr sz="1300" b="1">
                 <a:solidFill>
                   <a:srgbClr val="C85526"/>
                 </a:solidFill>
                 <a:latin typeface="Calibri"/>
               </a:rPr>
-              <a:t>LA RESPUESTA</a:t>
+              <a:t>EVIDENCIA 1 DE 4</a:t>
             </a:r>
           </a:p>
         </p:txBody>
@@ -8827,20 +7586,20 @@
               </a:lnSpc>
             </a:pPr>
             <a:r>
-              <a:rPr sz="3000" b="1" i="0">
+              <a:rPr sz="3000" b="1">
                 <a:solidFill>
                   <a:srgbClr val="15150F"/>
                 </a:solidFill>
                 <a:latin typeface="Calibri"/>
               </a:rPr>
-              <a:t>La popularidad no depende de la calificación</a:t>
+              <a:t>Lo más visto no es lo mejor evaluado</a:t>
             </a:r>
           </a:p>
         </p:txBody>
       </p:sp>
       <p:pic>
         <p:nvPicPr>
-          <p:cNvPr id="5" name="Picture 4" descr="v6_dispersion_popularidad_calificacion.png"/>
+          <p:cNvPr id="5" name="Picture 4" descr="v7_top10_populares.png"/>
           <p:cNvPicPr>
             <a:picLocks noChangeAspect="1"/>
           </p:cNvPicPr>
@@ -8854,59 +7613,14 @@
         </p:blipFill>
         <p:spPr>
           <a:xfrm>
-            <a:off x="1783080" y="1737360"/>
-            <a:ext cx="8595360" cy="4813402"/>
+            <a:off x="1604554" y="1558462"/>
+            <a:ext cx="8982892" cy="4961979"/>
           </a:xfrm>
           <a:prstGeom prst="rect">
             <a:avLst/>
           </a:prstGeom>
         </p:spPr>
       </p:pic>
-      <p:sp>
-        <p:nvSpPr>
-          <p:cNvPr id="6" name="Rectangle 5"/>
-          <p:cNvSpPr/>
-          <p:nvPr/>
-        </p:nvSpPr>
-        <p:spPr>
-          <a:xfrm>
-            <a:off x="1783080" y="1737360"/>
-            <a:ext cx="8595360" cy="4813402"/>
-          </a:xfrm>
-          <a:prstGeom prst="rect">
-            <a:avLst/>
-          </a:prstGeom>
-          <a:noFill/>
-          <a:ln w="9525">
-            <a:solidFill>
-              <a:srgbClr val="DDD8C6"/>
-            </a:solidFill>
-          </a:ln>
-          <a:effectLst/>
-        </p:spPr>
-        <p:style>
-          <a:lnRef idx="1">
-            <a:schemeClr val="accent1"/>
-          </a:lnRef>
-          <a:fillRef idx="3">
-            <a:schemeClr val="accent1"/>
-          </a:fillRef>
-          <a:effectRef idx="2">
-            <a:schemeClr val="accent1"/>
-          </a:effectRef>
-          <a:fontRef idx="minor">
-            <a:schemeClr val="lt1"/>
-          </a:fontRef>
-        </p:style>
-        <p:txBody>
-          <a:bodyPr rtlCol="0" anchor="ctr"/>
-          <a:lstStyle/>
-          <a:p>
-            <a:pPr algn="ctr"/>
-            <a:endParaRPr/>
-          </a:p>
-        </p:txBody>
-      </p:sp>
     </p:spTree>
   </p:cSld>
   <p:clrMapOvr>
@@ -8940,7 +7654,7 @@
         </p:nvSpPr>
         <p:spPr>
           <a:xfrm>
-            <a:off x="0" y="0"/>
+            <a:off x="-15088" y="0"/>
             <a:ext cx="12191695" cy="6858000"/>
           </a:xfrm>
           <a:prstGeom prst="rect">
@@ -9005,59 +7719,20 @@
               </a:lnSpc>
             </a:pPr>
             <a:r>
-              <a:rPr sz="1300" b="1" i="0">
+              <a:rPr sz="1300" b="1">
                 <a:solidFill>
                   <a:srgbClr val="C85526"/>
                 </a:solidFill>
                 <a:latin typeface="Calibri"/>
               </a:rPr>
-              <a:t>EVIDENCIA 1 DE 4</a:t>
-            </a:r>
-          </a:p>
-        </p:txBody>
-      </p:sp>
-      <p:sp>
-        <p:nvSpPr>
-          <p:cNvPr id="4" name="TextBox 3"/>
-          <p:cNvSpPr txBox="1"/>
-          <p:nvPr/>
-        </p:nvSpPr>
-        <p:spPr>
-          <a:xfrm>
-            <a:off x="640080" y="777240"/>
-            <a:ext cx="10881360" cy="1005840"/>
-          </a:xfrm>
-          <a:prstGeom prst="rect">
-            <a:avLst/>
-          </a:prstGeom>
-          <a:noFill/>
-        </p:spPr>
-        <p:txBody>
-          <a:bodyPr wrap="square">
-            <a:spAutoFit/>
-          </a:bodyPr>
-          <a:lstStyle/>
-          <a:p>
-            <a:pPr algn="l">
-              <a:lnSpc>
-                <a:spcPct val="115000"/>
-              </a:lnSpc>
-            </a:pPr>
-            <a:r>
-              <a:rPr sz="3000" b="1" i="0">
-                <a:solidFill>
-                  <a:srgbClr val="15150F"/>
-                </a:solidFill>
-                <a:latin typeface="Calibri"/>
-              </a:rPr>
-              <a:t>Lo más visto no es lo mejor evaluado</a:t>
+              <a:t>EVIDENCIA 2 DE 4</a:t>
             </a:r>
           </a:p>
         </p:txBody>
       </p:sp>
       <p:pic>
         <p:nvPicPr>
-          <p:cNvPr id="5" name="Picture 4" descr="v7_top10_populares.png"/>
+          <p:cNvPr id="5" name="Picture 4" descr="v16_calificacion_por_genero.png"/>
           <p:cNvPicPr>
             <a:picLocks noChangeAspect="1"/>
           </p:cNvPicPr>
@@ -9071,59 +7746,14 @@
         </p:blipFill>
         <p:spPr>
           <a:xfrm>
-            <a:off x="2103120" y="1600200"/>
-            <a:ext cx="7955279" cy="4394345"/>
+            <a:off x="1312620" y="1060485"/>
+            <a:ext cx="9536278" cy="5340315"/>
           </a:xfrm>
           <a:prstGeom prst="rect">
             <a:avLst/>
           </a:prstGeom>
         </p:spPr>
       </p:pic>
-      <p:sp>
-        <p:nvSpPr>
-          <p:cNvPr id="6" name="Rectangle 5"/>
-          <p:cNvSpPr/>
-          <p:nvPr/>
-        </p:nvSpPr>
-        <p:spPr>
-          <a:xfrm>
-            <a:off x="2103120" y="1600200"/>
-            <a:ext cx="7955279" cy="4394345"/>
-          </a:xfrm>
-          <a:prstGeom prst="rect">
-            <a:avLst/>
-          </a:prstGeom>
-          <a:noFill/>
-          <a:ln w="9525">
-            <a:solidFill>
-              <a:srgbClr val="DDD8C6"/>
-            </a:solidFill>
-          </a:ln>
-          <a:effectLst/>
-        </p:spPr>
-        <p:style>
-          <a:lnRef idx="1">
-            <a:schemeClr val="accent1"/>
-          </a:lnRef>
-          <a:fillRef idx="3">
-            <a:schemeClr val="accent1"/>
-          </a:fillRef>
-          <a:effectRef idx="2">
-            <a:schemeClr val="accent1"/>
-          </a:effectRef>
-          <a:fontRef idx="minor">
-            <a:schemeClr val="lt1"/>
-          </a:fontRef>
-        </p:style>
-        <p:txBody>
-          <a:bodyPr rtlCol="0" anchor="ctr"/>
-          <a:lstStyle/>
-          <a:p>
-            <a:pPr algn="ctr"/>
-            <a:endParaRPr/>
-          </a:p>
-        </p:txBody>
-      </p:sp>
     </p:spTree>
   </p:cSld>
   <p:clrMapOvr>
